--- a/business-development/templates/Consulting-Template-Dark.pptx
+++ b/business-development/templates/Consulting-Template-Dark.pptx
@@ -24,9 +24,12 @@
     <p:sldId id="272" r:id="rId18"/>
     <p:sldId id="273" r:id="rId19"/>
     <p:sldId id="274" r:id="rId20"/>
+    <p:sldId id="275" r:id="rId21"/>
+    <p:sldId id="276" r:id="rId22"/>
+    <p:sldId id="277" r:id="rId23"/>
   </p:sldIdLst>
   <p:notesMasterIdLst>
-    <p:notesMasterId r:id="rId21"/>
+    <p:notesMasterId r:id="rId24"/>
   </p:notesMasterIdLst>
   <p:sldSz cx="12192000" cy="6858000"/>
   <p:notesSz cx="6858000" cy="12192000"/>
@@ -1791,6 +1794,270 @@
             <a:fld id="{F7021451-1387-4CA6-816F-3879F97B5CBC}" type="slidenum">
               <a:rPr lang="en-US"/>
               <a:t>2</a:t>
+            </a:fld>
+            <a:endParaRPr lang="en-US"/>
+          </a:p>
+        </p:txBody>
+      </p:sp>
+    </p:spTree>
+    <p:extLst>
+      <p:ext uri="{BB962C8B-B14F-4D97-AF65-F5344CB8AC3E}">
+        <p14:creationId xmlns:p14="http://schemas.microsoft.com/office/powerpoint/2010/main" val="1024086991"/>
+      </p:ext>
+    </p:extLst>
+  </p:cSld>
+  <p:clrMapOvr>
+    <a:masterClrMapping/>
+  </p:clrMapOvr>
+</p:notes>
+</file>
+
+<file path=ppt/notesSlides/notesSlide20.xml><?xml version="1.0" encoding="utf-8"?>
+<p:notes xmlns:a="http://schemas.openxmlformats.org/drawingml/2006/main" xmlns:r="http://schemas.openxmlformats.org/officeDocument/2006/relationships" xmlns:p="http://schemas.openxmlformats.org/presentationml/2006/main">
+  <p:cSld>
+    <p:spTree>
+      <p:nvGrpSpPr>
+        <p:cNvPr id="1" name=""/>
+        <p:cNvGrpSpPr/>
+        <p:nvPr/>
+      </p:nvGrpSpPr>
+      <p:grpSpPr>
+        <a:xfrm>
+          <a:off x="0" y="0"/>
+          <a:ext cx="0" cy="0"/>
+          <a:chOff x="0" y="0"/>
+          <a:chExt cx="0" cy="0"/>
+        </a:xfrm>
+      </p:grpSpPr>
+      <p:sp>
+        <p:nvSpPr>
+          <p:cNvPr id="2" name="Slide Image Placeholder 1"/>
+          <p:cNvSpPr>
+            <a:spLocks noGrp="1" noRot="1" noChangeAspect="1"/>
+          </p:cNvSpPr>
+          <p:nvPr>
+            <p:ph type="sldImg"/>
+          </p:nvPr>
+        </p:nvSpPr>
+        <p:spPr/>
+      </p:sp>
+      <p:sp>
+        <p:nvSpPr>
+          <p:cNvPr id="3" name="Notes Placeholder 2"/>
+          <p:cNvSpPr>
+            <a:spLocks noGrp="1"/>
+          </p:cNvSpPr>
+          <p:nvPr>
+            <p:ph type="body" idx="1"/>
+          </p:nvPr>
+        </p:nvSpPr>
+        <p:spPr/>
+        <p:txBody>
+          <a:bodyPr/>
+          <a:lstStyle/>
+          <a:p>
+            <a:r>
+              <a:rPr lang="en-US" dirty="0"/>
+              <a:t/>
+            </a:r>
+            <a:endParaRPr lang="en-US" dirty="0"/>
+          </a:p>
+        </p:txBody>
+      </p:sp>
+      <p:sp>
+        <p:nvSpPr>
+          <p:cNvPr id="4" name="Slide Number Placeholder 3"/>
+          <p:cNvSpPr>
+            <a:spLocks noGrp="1"/>
+          </p:cNvSpPr>
+          <p:nvPr>
+            <p:ph type="sldNum" sz="quarter" idx="10"/>
+          </p:nvPr>
+        </p:nvSpPr>
+        <p:spPr/>
+        <p:txBody>
+          <a:bodyPr/>
+          <a:lstStyle/>
+          <a:p>
+            <a:fld id="{F7021451-1387-4CA6-816F-3879F97B5CBC}" type="slidenum">
+              <a:rPr lang="en-US"/>
+              <a:t>20</a:t>
+            </a:fld>
+            <a:endParaRPr lang="en-US"/>
+          </a:p>
+        </p:txBody>
+      </p:sp>
+    </p:spTree>
+    <p:extLst>
+      <p:ext uri="{BB962C8B-B14F-4D97-AF65-F5344CB8AC3E}">
+        <p14:creationId xmlns:p14="http://schemas.microsoft.com/office/powerpoint/2010/main" val="1024086991"/>
+      </p:ext>
+    </p:extLst>
+  </p:cSld>
+  <p:clrMapOvr>
+    <a:masterClrMapping/>
+  </p:clrMapOvr>
+</p:notes>
+</file>
+
+<file path=ppt/notesSlides/notesSlide21.xml><?xml version="1.0" encoding="utf-8"?>
+<p:notes xmlns:a="http://schemas.openxmlformats.org/drawingml/2006/main" xmlns:r="http://schemas.openxmlformats.org/officeDocument/2006/relationships" xmlns:p="http://schemas.openxmlformats.org/presentationml/2006/main">
+  <p:cSld>
+    <p:spTree>
+      <p:nvGrpSpPr>
+        <p:cNvPr id="1" name=""/>
+        <p:cNvGrpSpPr/>
+        <p:nvPr/>
+      </p:nvGrpSpPr>
+      <p:grpSpPr>
+        <a:xfrm>
+          <a:off x="0" y="0"/>
+          <a:ext cx="0" cy="0"/>
+          <a:chOff x="0" y="0"/>
+          <a:chExt cx="0" cy="0"/>
+        </a:xfrm>
+      </p:grpSpPr>
+      <p:sp>
+        <p:nvSpPr>
+          <p:cNvPr id="2" name="Slide Image Placeholder 1"/>
+          <p:cNvSpPr>
+            <a:spLocks noGrp="1" noRot="1" noChangeAspect="1"/>
+          </p:cNvSpPr>
+          <p:nvPr>
+            <p:ph type="sldImg"/>
+          </p:nvPr>
+        </p:nvSpPr>
+        <p:spPr/>
+      </p:sp>
+      <p:sp>
+        <p:nvSpPr>
+          <p:cNvPr id="3" name="Notes Placeholder 2"/>
+          <p:cNvSpPr>
+            <a:spLocks noGrp="1"/>
+          </p:cNvSpPr>
+          <p:nvPr>
+            <p:ph type="body" idx="1"/>
+          </p:nvPr>
+        </p:nvSpPr>
+        <p:spPr/>
+        <p:txBody>
+          <a:bodyPr/>
+          <a:lstStyle/>
+          <a:p>
+            <a:r>
+              <a:rPr lang="en-US" dirty="0"/>
+              <a:t/>
+            </a:r>
+            <a:endParaRPr lang="en-US" dirty="0"/>
+          </a:p>
+        </p:txBody>
+      </p:sp>
+      <p:sp>
+        <p:nvSpPr>
+          <p:cNvPr id="4" name="Slide Number Placeholder 3"/>
+          <p:cNvSpPr>
+            <a:spLocks noGrp="1"/>
+          </p:cNvSpPr>
+          <p:nvPr>
+            <p:ph type="sldNum" sz="quarter" idx="10"/>
+          </p:nvPr>
+        </p:nvSpPr>
+        <p:spPr/>
+        <p:txBody>
+          <a:bodyPr/>
+          <a:lstStyle/>
+          <a:p>
+            <a:fld id="{F7021451-1387-4CA6-816F-3879F97B5CBC}" type="slidenum">
+              <a:rPr lang="en-US"/>
+              <a:t>21</a:t>
+            </a:fld>
+            <a:endParaRPr lang="en-US"/>
+          </a:p>
+        </p:txBody>
+      </p:sp>
+    </p:spTree>
+    <p:extLst>
+      <p:ext uri="{BB962C8B-B14F-4D97-AF65-F5344CB8AC3E}">
+        <p14:creationId xmlns:p14="http://schemas.microsoft.com/office/powerpoint/2010/main" val="1024086991"/>
+      </p:ext>
+    </p:extLst>
+  </p:cSld>
+  <p:clrMapOvr>
+    <a:masterClrMapping/>
+  </p:clrMapOvr>
+</p:notes>
+</file>
+
+<file path=ppt/notesSlides/notesSlide22.xml><?xml version="1.0" encoding="utf-8"?>
+<p:notes xmlns:a="http://schemas.openxmlformats.org/drawingml/2006/main" xmlns:r="http://schemas.openxmlformats.org/officeDocument/2006/relationships" xmlns:p="http://schemas.openxmlformats.org/presentationml/2006/main">
+  <p:cSld>
+    <p:spTree>
+      <p:nvGrpSpPr>
+        <p:cNvPr id="1" name=""/>
+        <p:cNvGrpSpPr/>
+        <p:nvPr/>
+      </p:nvGrpSpPr>
+      <p:grpSpPr>
+        <a:xfrm>
+          <a:off x="0" y="0"/>
+          <a:ext cx="0" cy="0"/>
+          <a:chOff x="0" y="0"/>
+          <a:chExt cx="0" cy="0"/>
+        </a:xfrm>
+      </p:grpSpPr>
+      <p:sp>
+        <p:nvSpPr>
+          <p:cNvPr id="2" name="Slide Image Placeholder 1"/>
+          <p:cNvSpPr>
+            <a:spLocks noGrp="1" noRot="1" noChangeAspect="1"/>
+          </p:cNvSpPr>
+          <p:nvPr>
+            <p:ph type="sldImg"/>
+          </p:nvPr>
+        </p:nvSpPr>
+        <p:spPr/>
+      </p:sp>
+      <p:sp>
+        <p:nvSpPr>
+          <p:cNvPr id="3" name="Notes Placeholder 2"/>
+          <p:cNvSpPr>
+            <a:spLocks noGrp="1"/>
+          </p:cNvSpPr>
+          <p:nvPr>
+            <p:ph type="body" idx="1"/>
+          </p:nvPr>
+        </p:nvSpPr>
+        <p:spPr/>
+        <p:txBody>
+          <a:bodyPr/>
+          <a:lstStyle/>
+          <a:p>
+            <a:r>
+              <a:rPr lang="en-US" dirty="0"/>
+              <a:t/>
+            </a:r>
+            <a:endParaRPr lang="en-US" dirty="0"/>
+          </a:p>
+        </p:txBody>
+      </p:sp>
+      <p:sp>
+        <p:nvSpPr>
+          <p:cNvPr id="4" name="Slide Number Placeholder 3"/>
+          <p:cNvSpPr>
+            <a:spLocks noGrp="1"/>
+          </p:cNvSpPr>
+          <p:nvPr>
+            <p:ph type="sldNum" sz="quarter" idx="10"/>
+          </p:nvPr>
+        </p:nvSpPr>
+        <p:spPr/>
+        <p:txBody>
+          <a:bodyPr/>
+          <a:lstStyle/>
+          <a:p>
+            <a:fld id="{F7021451-1387-4CA6-816F-3879F97B5CBC}" type="slidenum">
+              <a:rPr lang="en-US"/>
+              <a:t>22</a:t>
             </a:fld>
             <a:endParaRPr lang="en-US"/>
           </a:p>
@@ -5696,7 +5963,7 @@
                 <a:ea typeface="Cambria" pitchFamily="34" charset="-122"/>
                 <a:cs typeface="Cambria" pitchFamily="34" charset="-120"/>
               </a:rPr>
-              <a:t>Healthcare &amp; Life Sciences</a:t>
+              <a:t>Life Sciences</a:t>
             </a:r>
             <a:endParaRPr lang="en-US" sz="2800" dirty="0"/>
           </a:p>
@@ -5749,8 +6016,8 @@
         </p:nvSpPr>
         <p:spPr>
           <a:xfrm>
-            <a:off x="986752" y="2103120"/>
-            <a:ext cx="1554480" cy="1554480"/>
+            <a:off x="791947" y="2313432"/>
+            <a:ext cx="1133856" cy="1133856"/>
           </a:xfrm>
           <a:prstGeom prst="ellipse">
             <a:avLst/>
@@ -5771,8 +6038,8 @@
         </p:nvSpPr>
         <p:spPr>
           <a:xfrm>
-            <a:off x="1400632" y="2538374"/>
-            <a:ext cx="726719" cy="683971"/>
+            <a:off x="1093836" y="2630912"/>
+            <a:ext cx="530078" cy="498897"/>
           </a:xfrm>
           <a:prstGeom prst="heart">
             <a:avLst/>
@@ -5794,7 +6061,7 @@
         <p:spPr>
           <a:xfrm>
             <a:off x="548640" y="3886200"/>
-            <a:ext cx="2430704" cy="320040"/>
+            <a:ext cx="1620469" cy="320040"/>
           </a:xfrm>
           <a:prstGeom prst="rect">
             <a:avLst/>
@@ -5833,7 +6100,7 @@
         <p:spPr>
           <a:xfrm>
             <a:off x="640080" y="4224528"/>
-            <a:ext cx="2247824" cy="548640"/>
+            <a:ext cx="1437589" cy="548640"/>
           </a:xfrm>
           <a:prstGeom prst="rect">
             <a:avLst/>
@@ -5874,8 +6141,8 @@
         </p:nvSpPr>
         <p:spPr>
           <a:xfrm>
-            <a:off x="3874656" y="2103120"/>
-            <a:ext cx="1554480" cy="1554480"/>
+            <a:off x="2686736" y="2313432"/>
+            <a:ext cx="1133856" cy="1133856"/>
           </a:xfrm>
           <a:prstGeom prst="ellipse">
             <a:avLst/>
@@ -5896,8 +6163,8 @@
         </p:nvSpPr>
         <p:spPr>
           <a:xfrm>
-            <a:off x="4309910" y="2538374"/>
-            <a:ext cx="683971" cy="683971"/>
+            <a:off x="3004215" y="2630912"/>
+            <a:ext cx="498897" cy="498897"/>
           </a:xfrm>
           <a:prstGeom prst="plus">
             <a:avLst/>
@@ -5916,8 +6183,8 @@
         </p:nvSpPr>
         <p:spPr>
           <a:xfrm>
-            <a:off x="3436544" y="3886200"/>
-            <a:ext cx="2430704" cy="320040"/>
+            <a:off x="2443429" y="3886200"/>
+            <a:ext cx="1620469" cy="320040"/>
           </a:xfrm>
           <a:prstGeom prst="rect">
             <a:avLst/>
@@ -5955,8 +6222,8 @@
         </p:nvSpPr>
         <p:spPr>
           <a:xfrm>
-            <a:off x="3527984" y="4224528"/>
-            <a:ext cx="2247824" cy="548640"/>
+            <a:off x="2534869" y="4224528"/>
+            <a:ext cx="1437589" cy="548640"/>
           </a:xfrm>
           <a:prstGeom prst="rect">
             <a:avLst/>
@@ -5997,8 +6264,8 @@
         </p:nvSpPr>
         <p:spPr>
           <a:xfrm>
-            <a:off x="6762560" y="2103120"/>
-            <a:ext cx="1554480" cy="1554480"/>
+            <a:off x="4581525" y="2313432"/>
+            <a:ext cx="1133856" cy="1133856"/>
           </a:xfrm>
           <a:prstGeom prst="ellipse">
             <a:avLst/>
@@ -6019,8 +6286,8 @@
         </p:nvSpPr>
         <p:spPr>
           <a:xfrm flipV="1">
-            <a:off x="7197814" y="2517000"/>
-            <a:ext cx="341986" cy="598475"/>
+            <a:off x="4899005" y="2615321"/>
+            <a:ext cx="249448" cy="436535"/>
           </a:xfrm>
           <a:prstGeom prst="line">
             <a:avLst/>
@@ -6042,8 +6309,8 @@
         </p:nvSpPr>
         <p:spPr>
           <a:xfrm>
-            <a:off x="7197814" y="3115475"/>
-            <a:ext cx="683971" cy="914"/>
+            <a:off x="4899005" y="3051856"/>
+            <a:ext cx="498897" cy="914"/>
           </a:xfrm>
           <a:prstGeom prst="line">
             <a:avLst/>
@@ -6065,8 +6332,8 @@
         </p:nvSpPr>
         <p:spPr>
           <a:xfrm>
-            <a:off x="7539800" y="2517000"/>
-            <a:ext cx="341986" cy="598475"/>
+            <a:off x="5148453" y="2615321"/>
+            <a:ext cx="249448" cy="436535"/>
           </a:xfrm>
           <a:prstGeom prst="line">
             <a:avLst/>
@@ -6088,8 +6355,8 @@
         </p:nvSpPr>
         <p:spPr>
           <a:xfrm>
-            <a:off x="7471402" y="2448603"/>
-            <a:ext cx="136794" cy="136794"/>
+            <a:off x="5098563" y="2565431"/>
+            <a:ext cx="99779" cy="99779"/>
           </a:xfrm>
           <a:prstGeom prst="ellipse">
             <a:avLst/>
@@ -6108,8 +6375,8 @@
         </p:nvSpPr>
         <p:spPr>
           <a:xfrm>
-            <a:off x="7129417" y="3047078"/>
-            <a:ext cx="136794" cy="136794"/>
+            <a:off x="4849115" y="3001966"/>
+            <a:ext cx="99779" cy="99779"/>
           </a:xfrm>
           <a:prstGeom prst="ellipse">
             <a:avLst/>
@@ -6128,8 +6395,8 @@
         </p:nvSpPr>
         <p:spPr>
           <a:xfrm>
-            <a:off x="7813388" y="3047078"/>
-            <a:ext cx="136794" cy="136794"/>
+            <a:off x="5348012" y="3001966"/>
+            <a:ext cx="99779" cy="99779"/>
           </a:xfrm>
           <a:prstGeom prst="ellipse">
             <a:avLst/>
@@ -6148,8 +6415,8 @@
         </p:nvSpPr>
         <p:spPr>
           <a:xfrm>
-            <a:off x="6324448" y="3886200"/>
-            <a:ext cx="2430704" cy="320040"/>
+            <a:off x="4338218" y="3886200"/>
+            <a:ext cx="1620469" cy="320040"/>
           </a:xfrm>
           <a:prstGeom prst="rect">
             <a:avLst/>
@@ -6187,8 +6454,8 @@
         </p:nvSpPr>
         <p:spPr>
           <a:xfrm>
-            <a:off x="6415888" y="4224528"/>
-            <a:ext cx="2247824" cy="548640"/>
+            <a:off x="4429658" y="4224528"/>
+            <a:ext cx="1437589" cy="548640"/>
           </a:xfrm>
           <a:prstGeom prst="rect">
             <a:avLst/>
@@ -6229,8 +6496,8 @@
         </p:nvSpPr>
         <p:spPr>
           <a:xfrm>
-            <a:off x="9650463" y="2103120"/>
-            <a:ext cx="1554480" cy="1554480"/>
+            <a:off x="6476314" y="2313432"/>
+            <a:ext cx="1133856" cy="1133856"/>
           </a:xfrm>
           <a:prstGeom prst="ellipse">
             <a:avLst/>
@@ -6251,12 +6518,12 @@
         </p:nvSpPr>
         <p:spPr>
           <a:xfrm>
-            <a:off x="10213962" y="2474252"/>
-            <a:ext cx="427482" cy="812216"/>
+            <a:off x="6887337" y="2584140"/>
+            <a:ext cx="311810" cy="592440"/>
           </a:xfrm>
           <a:prstGeom prst="roundRect">
             <a:avLst>
-              <a:gd name="adj" fmla="val 32086"/>
+              <a:gd name="adj" fmla="val 43988"/>
             </a:avLst>
           </a:prstGeom>
           <a:ln w="22225">
@@ -6275,8 +6542,8 @@
         </p:nvSpPr>
         <p:spPr>
           <a:xfrm>
-            <a:off x="10213962" y="2880360"/>
-            <a:ext cx="427482" cy="914"/>
+            <a:off x="6887337" y="2880360"/>
+            <a:ext cx="311810" cy="914"/>
           </a:xfrm>
           <a:prstGeom prst="line">
             <a:avLst/>
@@ -6298,8 +6565,8 @@
         </p:nvSpPr>
         <p:spPr>
           <a:xfrm>
-            <a:off x="9212351" y="3886200"/>
-            <a:ext cx="2430704" cy="320040"/>
+            <a:off x="6233008" y="3886200"/>
+            <a:ext cx="1620469" cy="320040"/>
           </a:xfrm>
           <a:prstGeom prst="rect">
             <a:avLst/>
@@ -6337,8 +6604,8 @@
         </p:nvSpPr>
         <p:spPr>
           <a:xfrm>
-            <a:off x="9303791" y="4224528"/>
-            <a:ext cx="2247824" cy="548640"/>
+            <a:off x="6324448" y="4224528"/>
+            <a:ext cx="1437589" cy="548640"/>
           </a:xfrm>
           <a:prstGeom prst="rect">
             <a:avLst/>
@@ -6366,6 +6633,448 @@
                 <a:cs typeface="Calibri" pitchFamily="34" charset="-120"/>
               </a:rPr>
               <a:t>Pharmaceutical · Therapeutics · Drug Development</a:t>
+            </a:r>
+            <a:endParaRPr lang="en-US" sz="1000" dirty="0"/>
+          </a:p>
+        </p:txBody>
+      </p:sp>
+      <p:sp>
+        <p:nvSpPr>
+          <p:cNvPr id="26" name="Shape 24"/>
+          <p:cNvSpPr/>
+          <p:nvPr/>
+        </p:nvSpPr>
+        <p:spPr>
+          <a:xfrm>
+            <a:off x="8371103" y="2313432"/>
+            <a:ext cx="1133856" cy="1133856"/>
+          </a:xfrm>
+          <a:prstGeom prst="ellipse">
+            <a:avLst/>
+          </a:prstGeom>
+          <a:ln w="19050">
+            <a:solidFill>
+              <a:srgbClr val="D4AF5A"/>
+            </a:solidFill>
+            <a:prstDash val="solid"/>
+          </a:ln>
+        </p:spPr>
+      </p:sp>
+      <p:sp>
+        <p:nvSpPr>
+          <p:cNvPr id="27" name="Shape 25"/>
+          <p:cNvSpPr/>
+          <p:nvPr/>
+        </p:nvSpPr>
+        <p:spPr>
+          <a:xfrm>
+            <a:off x="8800835" y="2571668"/>
+            <a:ext cx="56126" cy="56126"/>
+          </a:xfrm>
+          <a:prstGeom prst="ellipse">
+            <a:avLst/>
+          </a:prstGeom>
+          <a:solidFill>
+            <a:srgbClr val="D4AF5A"/>
+          </a:solidFill>
+          <a:ln/>
+        </p:spPr>
+      </p:sp>
+      <p:sp>
+        <p:nvSpPr>
+          <p:cNvPr id="28" name="Shape 26"/>
+          <p:cNvSpPr/>
+          <p:nvPr/>
+        </p:nvSpPr>
+        <p:spPr>
+          <a:xfrm>
+            <a:off x="8828898" y="2599731"/>
+            <a:ext cx="218267" cy="140315"/>
+          </a:xfrm>
+          <a:prstGeom prst="line">
+            <a:avLst/>
+          </a:prstGeom>
+          <a:noFill/>
+          <a:ln w="15875">
+            <a:solidFill>
+              <a:srgbClr val="D4AF5A"/>
+            </a:solidFill>
+            <a:prstDash val="solid"/>
+          </a:ln>
+        </p:spPr>
+      </p:sp>
+      <p:sp>
+        <p:nvSpPr>
+          <p:cNvPr id="29" name="Shape 27"/>
+          <p:cNvSpPr/>
+          <p:nvPr/>
+        </p:nvSpPr>
+        <p:spPr>
+          <a:xfrm>
+            <a:off x="9019102" y="2711982"/>
+            <a:ext cx="56126" cy="56126"/>
+          </a:xfrm>
+          <a:prstGeom prst="ellipse">
+            <a:avLst/>
+          </a:prstGeom>
+          <a:solidFill>
+            <a:srgbClr val="D4AF5A"/>
+          </a:solidFill>
+          <a:ln/>
+        </p:spPr>
+      </p:sp>
+      <p:sp>
+        <p:nvSpPr>
+          <p:cNvPr id="30" name="Shape 28"/>
+          <p:cNvSpPr/>
+          <p:nvPr/>
+        </p:nvSpPr>
+        <p:spPr>
+          <a:xfrm flipV="1">
+            <a:off x="8828898" y="2740045"/>
+            <a:ext cx="218267" cy="140315"/>
+          </a:xfrm>
+          <a:prstGeom prst="line">
+            <a:avLst/>
+          </a:prstGeom>
+          <a:noFill/>
+          <a:ln w="15875">
+            <a:solidFill>
+              <a:srgbClr val="D4AF5A"/>
+            </a:solidFill>
+            <a:prstDash val="solid"/>
+          </a:ln>
+        </p:spPr>
+      </p:sp>
+      <p:sp>
+        <p:nvSpPr>
+          <p:cNvPr id="31" name="Shape 29"/>
+          <p:cNvSpPr/>
+          <p:nvPr/>
+        </p:nvSpPr>
+        <p:spPr>
+          <a:xfrm>
+            <a:off x="8800835" y="2852297"/>
+            <a:ext cx="56126" cy="56126"/>
+          </a:xfrm>
+          <a:prstGeom prst="ellipse">
+            <a:avLst/>
+          </a:prstGeom>
+          <a:solidFill>
+            <a:srgbClr val="D4AF5A"/>
+          </a:solidFill>
+          <a:ln/>
+        </p:spPr>
+      </p:sp>
+      <p:sp>
+        <p:nvSpPr>
+          <p:cNvPr id="32" name="Shape 30"/>
+          <p:cNvSpPr/>
+          <p:nvPr/>
+        </p:nvSpPr>
+        <p:spPr>
+          <a:xfrm>
+            <a:off x="8828898" y="2880360"/>
+            <a:ext cx="218267" cy="140315"/>
+          </a:xfrm>
+          <a:prstGeom prst="line">
+            <a:avLst/>
+          </a:prstGeom>
+          <a:noFill/>
+          <a:ln w="15875">
+            <a:solidFill>
+              <a:srgbClr val="D4AF5A"/>
+            </a:solidFill>
+            <a:prstDash val="solid"/>
+          </a:ln>
+        </p:spPr>
+      </p:sp>
+      <p:sp>
+        <p:nvSpPr>
+          <p:cNvPr id="33" name="Shape 31"/>
+          <p:cNvSpPr/>
+          <p:nvPr/>
+        </p:nvSpPr>
+        <p:spPr>
+          <a:xfrm>
+            <a:off x="9019102" y="2992612"/>
+            <a:ext cx="56126" cy="56126"/>
+          </a:xfrm>
+          <a:prstGeom prst="ellipse">
+            <a:avLst/>
+          </a:prstGeom>
+          <a:solidFill>
+            <a:srgbClr val="D4AF5A"/>
+          </a:solidFill>
+          <a:ln/>
+        </p:spPr>
+      </p:sp>
+      <p:sp>
+        <p:nvSpPr>
+          <p:cNvPr id="34" name="Shape 32"/>
+          <p:cNvSpPr/>
+          <p:nvPr/>
+        </p:nvSpPr>
+        <p:spPr>
+          <a:xfrm flipV="1">
+            <a:off x="8828898" y="3020675"/>
+            <a:ext cx="218267" cy="140315"/>
+          </a:xfrm>
+          <a:prstGeom prst="line">
+            <a:avLst/>
+          </a:prstGeom>
+          <a:noFill/>
+          <a:ln w="15875">
+            <a:solidFill>
+              <a:srgbClr val="D4AF5A"/>
+            </a:solidFill>
+            <a:prstDash val="solid"/>
+          </a:ln>
+        </p:spPr>
+      </p:sp>
+      <p:sp>
+        <p:nvSpPr>
+          <p:cNvPr id="35" name="Shape 33"/>
+          <p:cNvSpPr/>
+          <p:nvPr/>
+        </p:nvSpPr>
+        <p:spPr>
+          <a:xfrm>
+            <a:off x="8800835" y="3132926"/>
+            <a:ext cx="56126" cy="56126"/>
+          </a:xfrm>
+          <a:prstGeom prst="ellipse">
+            <a:avLst/>
+          </a:prstGeom>
+          <a:solidFill>
+            <a:srgbClr val="D4AF5A"/>
+          </a:solidFill>
+          <a:ln/>
+        </p:spPr>
+      </p:sp>
+      <p:sp>
+        <p:nvSpPr>
+          <p:cNvPr id="36" name="Text 34"/>
+          <p:cNvSpPr/>
+          <p:nvPr/>
+        </p:nvSpPr>
+        <p:spPr>
+          <a:xfrm>
+            <a:off x="8127797" y="3886200"/>
+            <a:ext cx="1620469" cy="320040"/>
+          </a:xfrm>
+          <a:prstGeom prst="rect">
+            <a:avLst/>
+          </a:prstGeom>
+          <a:noFill/>
+          <a:ln/>
+        </p:spPr>
+        <p:txBody>
+          <a:bodyPr wrap="square" lIns="0" tIns="0" rIns="0" bIns="0" rtlCol="0" anchor="ctr"/>
+          <a:lstStyle/>
+          <a:p>
+            <a:pPr algn="ctr" indent="0" marL="0">
+              <a:buNone/>
+            </a:pPr>
+            <a:r>
+              <a:rPr lang="en-US" sz="1500" b="1" dirty="0">
+                <a:solidFill>
+                  <a:srgbClr val="F2F3F5"/>
+                </a:solidFill>
+                <a:latin typeface="Cambria" pitchFamily="34" charset="0"/>
+                <a:ea typeface="Cambria" pitchFamily="34" charset="-122"/>
+                <a:cs typeface="Cambria" pitchFamily="34" charset="-120"/>
+              </a:rPr>
+              <a:t>Genomics</a:t>
+            </a:r>
+            <a:endParaRPr lang="en-US" sz="1500" dirty="0"/>
+          </a:p>
+        </p:txBody>
+      </p:sp>
+      <p:sp>
+        <p:nvSpPr>
+          <p:cNvPr id="37" name="Text 35"/>
+          <p:cNvSpPr/>
+          <p:nvPr/>
+        </p:nvSpPr>
+        <p:spPr>
+          <a:xfrm>
+            <a:off x="8219237" y="4224528"/>
+            <a:ext cx="1437589" cy="548640"/>
+          </a:xfrm>
+          <a:prstGeom prst="rect">
+            <a:avLst/>
+          </a:prstGeom>
+          <a:noFill/>
+          <a:ln/>
+        </p:spPr>
+        <p:txBody>
+          <a:bodyPr wrap="square" lIns="0" tIns="0" rIns="0" bIns="0" rtlCol="0" anchor="ctr"/>
+          <a:lstStyle/>
+          <a:p>
+            <a:pPr algn="ctr" indent="0" marL="0">
+              <a:lnSpc>
+                <a:spcPct val="120000"/>
+              </a:lnSpc>
+              <a:buNone/>
+            </a:pPr>
+            <a:r>
+              <a:rPr lang="en-US" sz="1000" i="1" dirty="0">
+                <a:solidFill>
+                  <a:srgbClr val="A9B4C9"/>
+                </a:solidFill>
+                <a:latin typeface="Calibri" pitchFamily="34" charset="0"/>
+                <a:ea typeface="Calibri" pitchFamily="34" charset="-122"/>
+                <a:cs typeface="Calibri" pitchFamily="34" charset="-120"/>
+              </a:rPr>
+              <a:t>Genomics · DNA · Biotech · Precision Medicine</a:t>
+            </a:r>
+            <a:endParaRPr lang="en-US" sz="1000" dirty="0"/>
+          </a:p>
+        </p:txBody>
+      </p:sp>
+      <p:sp>
+        <p:nvSpPr>
+          <p:cNvPr id="38" name="Shape 36"/>
+          <p:cNvSpPr/>
+          <p:nvPr/>
+        </p:nvSpPr>
+        <p:spPr>
+          <a:xfrm>
+            <a:off x="10265893" y="2313432"/>
+            <a:ext cx="1133856" cy="1133856"/>
+          </a:xfrm>
+          <a:prstGeom prst="ellipse">
+            <a:avLst/>
+          </a:prstGeom>
+          <a:ln w="19050">
+            <a:solidFill>
+              <a:srgbClr val="D4AF5A"/>
+            </a:solidFill>
+            <a:prstDash val="solid"/>
+          </a:ln>
+        </p:spPr>
+      </p:sp>
+      <p:sp>
+        <p:nvSpPr>
+          <p:cNvPr id="39" name="Shape 37"/>
+          <p:cNvSpPr/>
+          <p:nvPr/>
+        </p:nvSpPr>
+        <p:spPr>
+          <a:xfrm flipV="1">
+            <a:off x="10661325" y="2849179"/>
+            <a:ext cx="342991" cy="311810"/>
+          </a:xfrm>
+          <a:prstGeom prst="triangle">
+            <a:avLst/>
+          </a:prstGeom>
+          <a:ln w="22225">
+            <a:solidFill>
+              <a:srgbClr val="D4AF5A"/>
+            </a:solidFill>
+            <a:prstDash val="solid"/>
+          </a:ln>
+        </p:spPr>
+      </p:sp>
+      <p:sp>
+        <p:nvSpPr>
+          <p:cNvPr id="40" name="Shape 38"/>
+          <p:cNvSpPr/>
+          <p:nvPr/>
+        </p:nvSpPr>
+        <p:spPr>
+          <a:xfrm>
+            <a:off x="10776695" y="2584140"/>
+            <a:ext cx="112252" cy="109134"/>
+          </a:xfrm>
+          <a:prstGeom prst="rect">
+            <a:avLst/>
+          </a:prstGeom>
+          <a:ln w="22225">
+            <a:solidFill>
+              <a:srgbClr val="D4AF5A"/>
+            </a:solidFill>
+            <a:prstDash val="solid"/>
+          </a:ln>
+        </p:spPr>
+      </p:sp>
+      <p:sp>
+        <p:nvSpPr>
+          <p:cNvPr id="41" name="Text 39"/>
+          <p:cNvSpPr/>
+          <p:nvPr/>
+        </p:nvSpPr>
+        <p:spPr>
+          <a:xfrm>
+            <a:off x="10022586" y="3886200"/>
+            <a:ext cx="1620469" cy="320040"/>
+          </a:xfrm>
+          <a:prstGeom prst="rect">
+            <a:avLst/>
+          </a:prstGeom>
+          <a:noFill/>
+          <a:ln/>
+        </p:spPr>
+        <p:txBody>
+          <a:bodyPr wrap="square" lIns="0" tIns="0" rIns="0" bIns="0" rtlCol="0" anchor="ctr"/>
+          <a:lstStyle/>
+          <a:p>
+            <a:pPr algn="ctr" indent="0" marL="0">
+              <a:buNone/>
+            </a:pPr>
+            <a:r>
+              <a:rPr lang="en-US" sz="1500" b="1" dirty="0">
+                <a:solidFill>
+                  <a:srgbClr val="F2F3F5"/>
+                </a:solidFill>
+                <a:latin typeface="Cambria" pitchFamily="34" charset="0"/>
+                <a:ea typeface="Cambria" pitchFamily="34" charset="-122"/>
+                <a:cs typeface="Cambria" pitchFamily="34" charset="-120"/>
+              </a:rPr>
+              <a:t>Research</a:t>
+            </a:r>
+            <a:endParaRPr lang="en-US" sz="1500" dirty="0"/>
+          </a:p>
+        </p:txBody>
+      </p:sp>
+      <p:sp>
+        <p:nvSpPr>
+          <p:cNvPr id="42" name="Text 40"/>
+          <p:cNvSpPr/>
+          <p:nvPr/>
+        </p:nvSpPr>
+        <p:spPr>
+          <a:xfrm>
+            <a:off x="10114026" y="4224528"/>
+            <a:ext cx="1437589" cy="548640"/>
+          </a:xfrm>
+          <a:prstGeom prst="rect">
+            <a:avLst/>
+          </a:prstGeom>
+          <a:noFill/>
+          <a:ln/>
+        </p:spPr>
+        <p:txBody>
+          <a:bodyPr wrap="square" lIns="0" tIns="0" rIns="0" bIns="0" rtlCol="0" anchor="ctr"/>
+          <a:lstStyle/>
+          <a:p>
+            <a:pPr algn="ctr" indent="0" marL="0">
+              <a:lnSpc>
+                <a:spcPct val="120000"/>
+              </a:lnSpc>
+              <a:buNone/>
+            </a:pPr>
+            <a:r>
+              <a:rPr lang="en-US" sz="1000" i="1" dirty="0">
+                <a:solidFill>
+                  <a:srgbClr val="A9B4C9"/>
+                </a:solidFill>
+                <a:latin typeface="Calibri" pitchFamily="34" charset="0"/>
+                <a:ea typeface="Calibri" pitchFamily="34" charset="-122"/>
+                <a:cs typeface="Calibri" pitchFamily="34" charset="-120"/>
+              </a:rPr>
+              <a:t>R&amp;D · Laboratory · Formulation · Discovery</a:t>
             </a:r>
             <a:endParaRPr lang="en-US" sz="1000" dirty="0"/>
           </a:p>
@@ -10464,6 +11173,2441 @@
             <a:fld id="{F7021451-1387-4CA6-816F-3879F97B5CBC}" type="slidenum">
               <a:rPr b="0" lang="en-US"/>
               <a:t>2</a:t>
+            </a:fld>
+            <a:endParaRPr lang="en-US"/>
+          </a:p>
+        </p:txBody>
+      </p:sp>
+    </p:spTree>
+  </p:cSld>
+  <p:clrMapOvr>
+    <a:masterClrMapping/>
+  </p:clrMapOvr>
+</p:sld>
+</file>
+
+<file path=ppt/slides/slide20.xml><?xml version="1.0" encoding="utf-8"?>
+<p:sld xmlns:a="http://schemas.openxmlformats.org/drawingml/2006/main" xmlns:r="http://schemas.openxmlformats.org/officeDocument/2006/relationships" xmlns:p="http://schemas.openxmlformats.org/presentationml/2006/main">
+  <p:cSld name="Slide 20">
+    <p:spTree>
+      <p:nvGrpSpPr>
+        <p:cNvPr id="1" name=""/>
+        <p:cNvGrpSpPr/>
+        <p:nvPr/>
+      </p:nvGrpSpPr>
+      <p:grpSpPr>
+        <a:xfrm>
+          <a:off x="0" y="0"/>
+          <a:ext cx="0" cy="0"/>
+          <a:chOff x="0" y="0"/>
+          <a:chExt cx="0" cy="0"/>
+        </a:xfrm>
+      </p:grpSpPr>
+      <p:sp>
+        <p:nvSpPr>
+          <p:cNvPr id="2" name="Text 0"/>
+          <p:cNvSpPr/>
+          <p:nvPr/>
+        </p:nvSpPr>
+        <p:spPr>
+          <a:xfrm>
+            <a:off x="548640" y="411480"/>
+            <a:ext cx="11094415" cy="594360"/>
+          </a:xfrm>
+          <a:prstGeom prst="rect">
+            <a:avLst/>
+          </a:prstGeom>
+          <a:noFill/>
+          <a:ln/>
+        </p:spPr>
+        <p:txBody>
+          <a:bodyPr wrap="square" lIns="0" tIns="0" rIns="0" bIns="0" rtlCol="0" anchor="ctr"/>
+          <a:lstStyle/>
+          <a:p>
+            <a:pPr algn="l" indent="0" marL="0">
+              <a:buNone/>
+            </a:pPr>
+            <a:r>
+              <a:rPr lang="en-US" sz="2800" b="1" dirty="0">
+                <a:solidFill>
+                  <a:srgbClr val="F2F3F5"/>
+                </a:solidFill>
+                <a:latin typeface="Cambria" pitchFamily="34" charset="0"/>
+                <a:ea typeface="Cambria" pitchFamily="34" charset="-122"/>
+                <a:cs typeface="Cambria" pitchFamily="34" charset="-120"/>
+              </a:rPr>
+              <a:t>Artificial Intelligence</a:t>
+            </a:r>
+            <a:endParaRPr lang="en-US" sz="2800" dirty="0"/>
+          </a:p>
+        </p:txBody>
+      </p:sp>
+      <p:sp>
+        <p:nvSpPr>
+          <p:cNvPr id="3" name="Text 1"/>
+          <p:cNvSpPr/>
+          <p:nvPr/>
+        </p:nvSpPr>
+        <p:spPr>
+          <a:xfrm>
+            <a:off x="548640" y="960120"/>
+            <a:ext cx="11094415" cy="365760"/>
+          </a:xfrm>
+          <a:prstGeom prst="rect">
+            <a:avLst/>
+          </a:prstGeom>
+          <a:noFill/>
+          <a:ln/>
+        </p:spPr>
+        <p:txBody>
+          <a:bodyPr wrap="square" lIns="0" tIns="0" rIns="0" bIns="0" rtlCol="0" anchor="ctr"/>
+          <a:lstStyle/>
+          <a:p>
+            <a:pPr algn="l" indent="0" marL="0">
+              <a:buNone/>
+            </a:pPr>
+            <a:r>
+              <a:rPr lang="en-US" sz="1300" dirty="0">
+                <a:solidFill>
+                  <a:srgbClr val="A9B4C9"/>
+                </a:solidFill>
+                <a:latin typeface="Calibri" pitchFamily="34" charset="0"/>
+                <a:ea typeface="Calibri" pitchFamily="34" charset="-122"/>
+                <a:cs typeface="Calibri" pitchFamily="34" charset="-120"/>
+              </a:rPr>
+              <a:t>Editable line icons — recolor, resize, or restyle natively in PowerPoint</a:t>
+            </a:r>
+            <a:endParaRPr lang="en-US" sz="1300" dirty="0"/>
+          </a:p>
+        </p:txBody>
+      </p:sp>
+      <p:sp>
+        <p:nvSpPr>
+          <p:cNvPr id="4" name="Shape 2"/>
+          <p:cNvSpPr/>
+          <p:nvPr/>
+        </p:nvSpPr>
+        <p:spPr>
+          <a:xfrm>
+            <a:off x="986752" y="2103120"/>
+            <a:ext cx="1554480" cy="1554480"/>
+          </a:xfrm>
+          <a:prstGeom prst="ellipse">
+            <a:avLst/>
+          </a:prstGeom>
+          <a:ln w="19050">
+            <a:solidFill>
+              <a:srgbClr val="D4AF5A"/>
+            </a:solidFill>
+            <a:prstDash val="solid"/>
+          </a:ln>
+        </p:spPr>
+      </p:sp>
+      <p:sp>
+        <p:nvSpPr>
+          <p:cNvPr id="5" name="Shape 3"/>
+          <p:cNvSpPr/>
+          <p:nvPr/>
+        </p:nvSpPr>
+        <p:spPr>
+          <a:xfrm>
+            <a:off x="1464755" y="2559749"/>
+            <a:ext cx="598475" cy="320611"/>
+          </a:xfrm>
+          <a:prstGeom prst="line">
+            <a:avLst/>
+          </a:prstGeom>
+          <a:noFill/>
+          <a:ln w="15875">
+            <a:solidFill>
+              <a:srgbClr val="D4AF5A"/>
+            </a:solidFill>
+            <a:prstDash val="solid"/>
+          </a:ln>
+        </p:spPr>
+      </p:sp>
+      <p:sp>
+        <p:nvSpPr>
+          <p:cNvPr id="6" name="Shape 4"/>
+          <p:cNvSpPr/>
+          <p:nvPr/>
+        </p:nvSpPr>
+        <p:spPr>
+          <a:xfrm>
+            <a:off x="1409182" y="2504176"/>
+            <a:ext cx="111145" cy="111145"/>
+          </a:xfrm>
+          <a:prstGeom prst="ellipse">
+            <a:avLst/>
+          </a:prstGeom>
+          <a:solidFill>
+            <a:srgbClr val="D4AF5A"/>
+          </a:solidFill>
+          <a:ln/>
+        </p:spPr>
+      </p:sp>
+      <p:sp>
+        <p:nvSpPr>
+          <p:cNvPr id="7" name="Shape 5"/>
+          <p:cNvSpPr/>
+          <p:nvPr/>
+        </p:nvSpPr>
+        <p:spPr>
+          <a:xfrm>
+            <a:off x="1464755" y="2880360"/>
+            <a:ext cx="598475" cy="914"/>
+          </a:xfrm>
+          <a:prstGeom prst="line">
+            <a:avLst/>
+          </a:prstGeom>
+          <a:noFill/>
+          <a:ln w="15875">
+            <a:solidFill>
+              <a:srgbClr val="D4AF5A"/>
+            </a:solidFill>
+            <a:prstDash val="solid"/>
+          </a:ln>
+        </p:spPr>
+      </p:sp>
+      <p:sp>
+        <p:nvSpPr>
+          <p:cNvPr id="8" name="Shape 6"/>
+          <p:cNvSpPr/>
+          <p:nvPr/>
+        </p:nvSpPr>
+        <p:spPr>
+          <a:xfrm>
+            <a:off x="1409182" y="2824787"/>
+            <a:ext cx="111145" cy="111145"/>
+          </a:xfrm>
+          <a:prstGeom prst="ellipse">
+            <a:avLst/>
+          </a:prstGeom>
+          <a:solidFill>
+            <a:srgbClr val="D4AF5A"/>
+          </a:solidFill>
+          <a:ln/>
+        </p:spPr>
+      </p:sp>
+      <p:sp>
+        <p:nvSpPr>
+          <p:cNvPr id="9" name="Shape 7"/>
+          <p:cNvSpPr/>
+          <p:nvPr/>
+        </p:nvSpPr>
+        <p:spPr>
+          <a:xfrm flipV="1">
+            <a:off x="1464755" y="2880360"/>
+            <a:ext cx="598475" cy="320611"/>
+          </a:xfrm>
+          <a:prstGeom prst="line">
+            <a:avLst/>
+          </a:prstGeom>
+          <a:noFill/>
+          <a:ln w="15875">
+            <a:solidFill>
+              <a:srgbClr val="D4AF5A"/>
+            </a:solidFill>
+            <a:prstDash val="solid"/>
+          </a:ln>
+        </p:spPr>
+      </p:sp>
+      <p:sp>
+        <p:nvSpPr>
+          <p:cNvPr id="10" name="Shape 8"/>
+          <p:cNvSpPr/>
+          <p:nvPr/>
+        </p:nvSpPr>
+        <p:spPr>
+          <a:xfrm>
+            <a:off x="1409182" y="3145399"/>
+            <a:ext cx="111145" cy="111145"/>
+          </a:xfrm>
+          <a:prstGeom prst="ellipse">
+            <a:avLst/>
+          </a:prstGeom>
+          <a:solidFill>
+            <a:srgbClr val="D4AF5A"/>
+          </a:solidFill>
+          <a:ln/>
+        </p:spPr>
+      </p:sp>
+      <p:sp>
+        <p:nvSpPr>
+          <p:cNvPr id="11" name="Shape 9"/>
+          <p:cNvSpPr/>
+          <p:nvPr/>
+        </p:nvSpPr>
+        <p:spPr>
+          <a:xfrm>
+            <a:off x="1986283" y="2803413"/>
+            <a:ext cx="153894" cy="153894"/>
+          </a:xfrm>
+          <a:prstGeom prst="ellipse">
+            <a:avLst/>
+          </a:prstGeom>
+          <a:solidFill>
+            <a:srgbClr val="D4AF5A"/>
+          </a:solidFill>
+          <a:ln/>
+        </p:spPr>
+      </p:sp>
+      <p:sp>
+        <p:nvSpPr>
+          <p:cNvPr id="12" name="Text 10"/>
+          <p:cNvSpPr/>
+          <p:nvPr/>
+        </p:nvSpPr>
+        <p:spPr>
+          <a:xfrm>
+            <a:off x="548640" y="3886200"/>
+            <a:ext cx="2430704" cy="320040"/>
+          </a:xfrm>
+          <a:prstGeom prst="rect">
+            <a:avLst/>
+          </a:prstGeom>
+          <a:noFill/>
+          <a:ln/>
+        </p:spPr>
+        <p:txBody>
+          <a:bodyPr wrap="square" lIns="0" tIns="0" rIns="0" bIns="0" rtlCol="0" anchor="ctr"/>
+          <a:lstStyle/>
+          <a:p>
+            <a:pPr algn="ctr" indent="0" marL="0">
+              <a:buNone/>
+            </a:pPr>
+            <a:r>
+              <a:rPr lang="en-US" sz="1500" b="1" dirty="0">
+                <a:solidFill>
+                  <a:srgbClr val="F2F3F5"/>
+                </a:solidFill>
+                <a:latin typeface="Cambria" pitchFamily="34" charset="0"/>
+                <a:ea typeface="Cambria" pitchFamily="34" charset="-122"/>
+                <a:cs typeface="Cambria" pitchFamily="34" charset="-120"/>
+              </a:rPr>
+              <a:t>Neural Network</a:t>
+            </a:r>
+            <a:endParaRPr lang="en-US" sz="1500" dirty="0"/>
+          </a:p>
+        </p:txBody>
+      </p:sp>
+      <p:sp>
+        <p:nvSpPr>
+          <p:cNvPr id="13" name="Text 11"/>
+          <p:cNvSpPr/>
+          <p:nvPr/>
+        </p:nvSpPr>
+        <p:spPr>
+          <a:xfrm>
+            <a:off x="640080" y="4224528"/>
+            <a:ext cx="2247824" cy="548640"/>
+          </a:xfrm>
+          <a:prstGeom prst="rect">
+            <a:avLst/>
+          </a:prstGeom>
+          <a:noFill/>
+          <a:ln/>
+        </p:spPr>
+        <p:txBody>
+          <a:bodyPr wrap="square" lIns="0" tIns="0" rIns="0" bIns="0" rtlCol="0" anchor="ctr"/>
+          <a:lstStyle/>
+          <a:p>
+            <a:pPr algn="ctr" indent="0" marL="0">
+              <a:lnSpc>
+                <a:spcPct val="120000"/>
+              </a:lnSpc>
+              <a:buNone/>
+            </a:pPr>
+            <a:r>
+              <a:rPr lang="en-US" sz="1000" i="1" dirty="0">
+                <a:solidFill>
+                  <a:srgbClr val="A9B4C9"/>
+                </a:solidFill>
+                <a:latin typeface="Calibri" pitchFamily="34" charset="0"/>
+                <a:ea typeface="Calibri" pitchFamily="34" charset="-122"/>
+                <a:cs typeface="Calibri" pitchFamily="34" charset="-120"/>
+              </a:rPr>
+              <a:t>AI · Machine Learning · Neural Network</a:t>
+            </a:r>
+            <a:endParaRPr lang="en-US" sz="1000" dirty="0"/>
+          </a:p>
+        </p:txBody>
+      </p:sp>
+      <p:sp>
+        <p:nvSpPr>
+          <p:cNvPr id="14" name="Shape 12"/>
+          <p:cNvSpPr/>
+          <p:nvPr/>
+        </p:nvSpPr>
+        <p:spPr>
+          <a:xfrm>
+            <a:off x="3874656" y="2103120"/>
+            <a:ext cx="1554480" cy="1554480"/>
+          </a:xfrm>
+          <a:prstGeom prst="ellipse">
+            <a:avLst/>
+          </a:prstGeom>
+          <a:ln w="19050">
+            <a:solidFill>
+              <a:srgbClr val="D4AF5A"/>
+            </a:solidFill>
+            <a:prstDash val="solid"/>
+          </a:ln>
+        </p:spPr>
+      </p:sp>
+      <p:sp>
+        <p:nvSpPr>
+          <p:cNvPr id="15" name="Shape 13"/>
+          <p:cNvSpPr/>
+          <p:nvPr/>
+        </p:nvSpPr>
+        <p:spPr>
+          <a:xfrm>
+            <a:off x="4288536" y="2517000"/>
+            <a:ext cx="726719" cy="726719"/>
+          </a:xfrm>
+          <a:prstGeom prst="gear6">
+            <a:avLst/>
+          </a:prstGeom>
+          <a:ln w="22225">
+            <a:solidFill>
+              <a:srgbClr val="D4AF5A"/>
+            </a:solidFill>
+            <a:prstDash val="solid"/>
+          </a:ln>
+        </p:spPr>
+      </p:sp>
+      <p:sp>
+        <p:nvSpPr>
+          <p:cNvPr id="16" name="Text 14"/>
+          <p:cNvSpPr/>
+          <p:nvPr/>
+        </p:nvSpPr>
+        <p:spPr>
+          <a:xfrm>
+            <a:off x="3436544" y="3886200"/>
+            <a:ext cx="2430704" cy="320040"/>
+          </a:xfrm>
+          <a:prstGeom prst="rect">
+            <a:avLst/>
+          </a:prstGeom>
+          <a:noFill/>
+          <a:ln/>
+        </p:spPr>
+        <p:txBody>
+          <a:bodyPr wrap="square" lIns="0" tIns="0" rIns="0" bIns="0" rtlCol="0" anchor="ctr"/>
+          <a:lstStyle/>
+          <a:p>
+            <a:pPr algn="ctr" indent="0" marL="0">
+              <a:buNone/>
+            </a:pPr>
+            <a:r>
+              <a:rPr lang="en-US" sz="1500" b="1" dirty="0">
+                <a:solidFill>
+                  <a:srgbClr val="F2F3F5"/>
+                </a:solidFill>
+                <a:latin typeface="Cambria" pitchFamily="34" charset="0"/>
+                <a:ea typeface="Cambria" pitchFamily="34" charset="-122"/>
+                <a:cs typeface="Cambria" pitchFamily="34" charset="-120"/>
+              </a:rPr>
+              <a:t>Automation</a:t>
+            </a:r>
+            <a:endParaRPr lang="en-US" sz="1500" dirty="0"/>
+          </a:p>
+        </p:txBody>
+      </p:sp>
+      <p:sp>
+        <p:nvSpPr>
+          <p:cNvPr id="17" name="Text 15"/>
+          <p:cNvSpPr/>
+          <p:nvPr/>
+        </p:nvSpPr>
+        <p:spPr>
+          <a:xfrm>
+            <a:off x="3527984" y="4224528"/>
+            <a:ext cx="2247824" cy="548640"/>
+          </a:xfrm>
+          <a:prstGeom prst="rect">
+            <a:avLst/>
+          </a:prstGeom>
+          <a:noFill/>
+          <a:ln/>
+        </p:spPr>
+        <p:txBody>
+          <a:bodyPr wrap="square" lIns="0" tIns="0" rIns="0" bIns="0" rtlCol="0" anchor="ctr"/>
+          <a:lstStyle/>
+          <a:p>
+            <a:pPr algn="ctr" indent="0" marL="0">
+              <a:lnSpc>
+                <a:spcPct val="120000"/>
+              </a:lnSpc>
+              <a:buNone/>
+            </a:pPr>
+            <a:r>
+              <a:rPr lang="en-US" sz="1000" i="1" dirty="0">
+                <a:solidFill>
+                  <a:srgbClr val="A9B4C9"/>
+                </a:solidFill>
+                <a:latin typeface="Calibri" pitchFamily="34" charset="0"/>
+                <a:ea typeface="Calibri" pitchFamily="34" charset="-122"/>
+                <a:cs typeface="Calibri" pitchFamily="34" charset="-120"/>
+              </a:rPr>
+              <a:t>Automation · AI · Intelligent Process</a:t>
+            </a:r>
+            <a:endParaRPr lang="en-US" sz="1000" dirty="0"/>
+          </a:p>
+        </p:txBody>
+      </p:sp>
+      <p:sp>
+        <p:nvSpPr>
+          <p:cNvPr id="18" name="Shape 16"/>
+          <p:cNvSpPr/>
+          <p:nvPr/>
+        </p:nvSpPr>
+        <p:spPr>
+          <a:xfrm>
+            <a:off x="6762560" y="2103120"/>
+            <a:ext cx="1554480" cy="1554480"/>
+          </a:xfrm>
+          <a:prstGeom prst="ellipse">
+            <a:avLst/>
+          </a:prstGeom>
+          <a:ln w="19050">
+            <a:solidFill>
+              <a:srgbClr val="D4AF5A"/>
+            </a:solidFill>
+            <a:prstDash val="solid"/>
+          </a:ln>
+        </p:spPr>
+      </p:sp>
+      <p:sp>
+        <p:nvSpPr>
+          <p:cNvPr id="19" name="Shape 17"/>
+          <p:cNvSpPr/>
+          <p:nvPr/>
+        </p:nvSpPr>
+        <p:spPr>
+          <a:xfrm>
+            <a:off x="7155066" y="2559749"/>
+            <a:ext cx="769468" cy="555727"/>
+          </a:xfrm>
+          <a:prstGeom prst="wedgeRoundRectCallout">
+            <a:avLst/>
+          </a:prstGeom>
+          <a:ln w="22225">
+            <a:solidFill>
+              <a:srgbClr val="D4AF5A"/>
+            </a:solidFill>
+            <a:prstDash val="solid"/>
+          </a:ln>
+        </p:spPr>
+      </p:sp>
+      <p:sp>
+        <p:nvSpPr>
+          <p:cNvPr id="20" name="Text 18"/>
+          <p:cNvSpPr/>
+          <p:nvPr/>
+        </p:nvSpPr>
+        <p:spPr>
+          <a:xfrm>
+            <a:off x="6324448" y="3886200"/>
+            <a:ext cx="2430704" cy="320040"/>
+          </a:xfrm>
+          <a:prstGeom prst="rect">
+            <a:avLst/>
+          </a:prstGeom>
+          <a:noFill/>
+          <a:ln/>
+        </p:spPr>
+        <p:txBody>
+          <a:bodyPr wrap="square" lIns="0" tIns="0" rIns="0" bIns="0" rtlCol="0" anchor="ctr"/>
+          <a:lstStyle/>
+          <a:p>
+            <a:pPr algn="ctr" indent="0" marL="0">
+              <a:buNone/>
+            </a:pPr>
+            <a:r>
+              <a:rPr lang="en-US" sz="1500" b="1" dirty="0">
+                <a:solidFill>
+                  <a:srgbClr val="F2F3F5"/>
+                </a:solidFill>
+                <a:latin typeface="Cambria" pitchFamily="34" charset="0"/>
+                <a:ea typeface="Cambria" pitchFamily="34" charset="-122"/>
+                <a:cs typeface="Cambria" pitchFamily="34" charset="-120"/>
+              </a:rPr>
+              <a:t>Assistant</a:t>
+            </a:r>
+            <a:endParaRPr lang="en-US" sz="1500" dirty="0"/>
+          </a:p>
+        </p:txBody>
+      </p:sp>
+      <p:sp>
+        <p:nvSpPr>
+          <p:cNvPr id="21" name="Text 19"/>
+          <p:cNvSpPr/>
+          <p:nvPr/>
+        </p:nvSpPr>
+        <p:spPr>
+          <a:xfrm>
+            <a:off x="6415888" y="4224528"/>
+            <a:ext cx="2247824" cy="548640"/>
+          </a:xfrm>
+          <a:prstGeom prst="rect">
+            <a:avLst/>
+          </a:prstGeom>
+          <a:noFill/>
+          <a:ln/>
+        </p:spPr>
+        <p:txBody>
+          <a:bodyPr wrap="square" lIns="0" tIns="0" rIns="0" bIns="0" rtlCol="0" anchor="ctr"/>
+          <a:lstStyle/>
+          <a:p>
+            <a:pPr algn="ctr" indent="0" marL="0">
+              <a:lnSpc>
+                <a:spcPct val="120000"/>
+              </a:lnSpc>
+              <a:buNone/>
+            </a:pPr>
+            <a:r>
+              <a:rPr lang="en-US" sz="1000" i="1" dirty="0">
+                <a:solidFill>
+                  <a:srgbClr val="A9B4C9"/>
+                </a:solidFill>
+                <a:latin typeface="Calibri" pitchFamily="34" charset="0"/>
+                <a:ea typeface="Calibri" pitchFamily="34" charset="-122"/>
+                <a:cs typeface="Calibri" pitchFamily="34" charset="-120"/>
+              </a:rPr>
+              <a:t>Conversational AI · Copilot · Chatbot</a:t>
+            </a:r>
+            <a:endParaRPr lang="en-US" sz="1000" dirty="0"/>
+          </a:p>
+        </p:txBody>
+      </p:sp>
+      <p:sp>
+        <p:nvSpPr>
+          <p:cNvPr id="22" name="Shape 20"/>
+          <p:cNvSpPr/>
+          <p:nvPr/>
+        </p:nvSpPr>
+        <p:spPr>
+          <a:xfrm>
+            <a:off x="9650463" y="2103120"/>
+            <a:ext cx="1554480" cy="1554480"/>
+          </a:xfrm>
+          <a:prstGeom prst="ellipse">
+            <a:avLst/>
+          </a:prstGeom>
+          <a:ln w="19050">
+            <a:solidFill>
+              <a:srgbClr val="D4AF5A"/>
+            </a:solidFill>
+            <a:prstDash val="solid"/>
+          </a:ln>
+        </p:spPr>
+      </p:sp>
+      <p:sp>
+        <p:nvSpPr>
+          <p:cNvPr id="23" name="Shape 21"/>
+          <p:cNvSpPr/>
+          <p:nvPr/>
+        </p:nvSpPr>
+        <p:spPr>
+          <a:xfrm>
+            <a:off x="10021595" y="2666619"/>
+            <a:ext cx="812216" cy="427482"/>
+          </a:xfrm>
+          <a:prstGeom prst="ellipse">
+            <a:avLst/>
+          </a:prstGeom>
+          <a:ln w="22225">
+            <a:solidFill>
+              <a:srgbClr val="D4AF5A"/>
+            </a:solidFill>
+            <a:prstDash val="solid"/>
+          </a:ln>
+        </p:spPr>
+      </p:sp>
+      <p:sp>
+        <p:nvSpPr>
+          <p:cNvPr id="24" name="Shape 22"/>
+          <p:cNvSpPr/>
+          <p:nvPr/>
+        </p:nvSpPr>
+        <p:spPr>
+          <a:xfrm>
+            <a:off x="10333657" y="2786314"/>
+            <a:ext cx="188092" cy="188092"/>
+          </a:xfrm>
+          <a:prstGeom prst="ellipse">
+            <a:avLst/>
+          </a:prstGeom>
+          <a:solidFill>
+            <a:srgbClr val="D4AF5A"/>
+          </a:solidFill>
+          <a:ln/>
+        </p:spPr>
+      </p:sp>
+      <p:sp>
+        <p:nvSpPr>
+          <p:cNvPr id="25" name="Text 23"/>
+          <p:cNvSpPr/>
+          <p:nvPr/>
+        </p:nvSpPr>
+        <p:spPr>
+          <a:xfrm>
+            <a:off x="9212351" y="3886200"/>
+            <a:ext cx="2430704" cy="320040"/>
+          </a:xfrm>
+          <a:prstGeom prst="rect">
+            <a:avLst/>
+          </a:prstGeom>
+          <a:noFill/>
+          <a:ln/>
+        </p:spPr>
+        <p:txBody>
+          <a:bodyPr wrap="square" lIns="0" tIns="0" rIns="0" bIns="0" rtlCol="0" anchor="ctr"/>
+          <a:lstStyle/>
+          <a:p>
+            <a:pPr algn="ctr" indent="0" marL="0">
+              <a:buNone/>
+            </a:pPr>
+            <a:r>
+              <a:rPr lang="en-US" sz="1500" b="1" dirty="0">
+                <a:solidFill>
+                  <a:srgbClr val="F2F3F5"/>
+                </a:solidFill>
+                <a:latin typeface="Cambria" pitchFamily="34" charset="0"/>
+                <a:ea typeface="Cambria" pitchFamily="34" charset="-122"/>
+                <a:cs typeface="Cambria" pitchFamily="34" charset="-120"/>
+              </a:rPr>
+              <a:t>Vision</a:t>
+            </a:r>
+            <a:endParaRPr lang="en-US" sz="1500" dirty="0"/>
+          </a:p>
+        </p:txBody>
+      </p:sp>
+      <p:sp>
+        <p:nvSpPr>
+          <p:cNvPr id="26" name="Text 24"/>
+          <p:cNvSpPr/>
+          <p:nvPr/>
+        </p:nvSpPr>
+        <p:spPr>
+          <a:xfrm>
+            <a:off x="9303791" y="4224528"/>
+            <a:ext cx="2247824" cy="548640"/>
+          </a:xfrm>
+          <a:prstGeom prst="rect">
+            <a:avLst/>
+          </a:prstGeom>
+          <a:noFill/>
+          <a:ln/>
+        </p:spPr>
+        <p:txBody>
+          <a:bodyPr wrap="square" lIns="0" tIns="0" rIns="0" bIns="0" rtlCol="0" anchor="ctr"/>
+          <a:lstStyle/>
+          <a:p>
+            <a:pPr algn="ctr" indent="0" marL="0">
+              <a:lnSpc>
+                <a:spcPct val="120000"/>
+              </a:lnSpc>
+              <a:buNone/>
+            </a:pPr>
+            <a:r>
+              <a:rPr lang="en-US" sz="1000" i="1" dirty="0">
+                <a:solidFill>
+                  <a:srgbClr val="A9B4C9"/>
+                </a:solidFill>
+                <a:latin typeface="Calibri" pitchFamily="34" charset="0"/>
+                <a:ea typeface="Calibri" pitchFamily="34" charset="-122"/>
+                <a:cs typeface="Calibri" pitchFamily="34" charset="-120"/>
+              </a:rPr>
+              <a:t>Computer Vision · Insight · Recognition</a:t>
+            </a:r>
+            <a:endParaRPr lang="en-US" sz="1000" dirty="0"/>
+          </a:p>
+        </p:txBody>
+      </p:sp>
+      <p:sp>
+        <p:nvSpPr>
+          <p:cNvPr id="25" name="Slide Number Placeholder 0"/>
+          <p:cNvSpPr>
+            <a:spLocks noGrp="1"/>
+          </p:cNvSpPr>
+          <p:nvPr>
+            <p:ph type="sldNum" sz="quarter" idx="4294967295"/>
+          </p:nvPr>
+        </p:nvSpPr>
+        <p:spPr>
+          <a:xfrm>
+            <a:off x="10728655" y="6446520"/>
+            <a:ext cx="800000" cy="300000"/>
+          </a:xfrm>
+          <a:prstGeom prst="rect">
+            <a:avLst/>
+          </a:prstGeom>
+          <a:extLst>
+            <a:ext uri="{C572A759-6A51-4108-AA02-DFA0A04FC94B}">
+              <ma14:wrappingTextBoxFlag xmlns:ma14="http://schemas.microsoft.com/office/mac/drawingml/2011/main" val="0"/>
+            </a:ext>
+          </a:extLst>
+        </p:spPr>
+        <p:txBody>
+          <a:bodyPr/>
+          <a:lstStyle>
+            <a:lvl1pPr>
+              <a:defRPr sz="1000">
+                <a:solidFill>
+                  <a:srgbClr val="A9B4C9"/>
+                </a:solidFill>
+                <a:latin typeface="Calibri"/>
+                <a:ea typeface="Calibri"/>
+                <a:cs typeface="Calibri"/>
+              </a:defRPr>
+            </a:lvl1pPr>
+          </a:lstStyle>
+          <a:p>
+            <a:pPr algn="r"/>
+            <a:fld id="{F7021451-1387-4CA6-816F-3879F97B5CBC}" type="slidenum">
+              <a:rPr b="0" lang="en-US"/>
+              <a:t>20</a:t>
+            </a:fld>
+            <a:endParaRPr lang="en-US"/>
+          </a:p>
+        </p:txBody>
+      </p:sp>
+    </p:spTree>
+  </p:cSld>
+  <p:clrMapOvr>
+    <a:masterClrMapping/>
+  </p:clrMapOvr>
+</p:sld>
+</file>
+
+<file path=ppt/slides/slide21.xml><?xml version="1.0" encoding="utf-8"?>
+<p:sld xmlns:a="http://schemas.openxmlformats.org/drawingml/2006/main" xmlns:r="http://schemas.openxmlformats.org/officeDocument/2006/relationships" xmlns:p="http://schemas.openxmlformats.org/presentationml/2006/main">
+  <p:cSld name="Slide 21">
+    <p:spTree>
+      <p:nvGrpSpPr>
+        <p:cNvPr id="1" name=""/>
+        <p:cNvGrpSpPr/>
+        <p:nvPr/>
+      </p:nvGrpSpPr>
+      <p:grpSpPr>
+        <a:xfrm>
+          <a:off x="0" y="0"/>
+          <a:ext cx="0" cy="0"/>
+          <a:chOff x="0" y="0"/>
+          <a:chExt cx="0" cy="0"/>
+        </a:xfrm>
+      </p:grpSpPr>
+      <p:sp>
+        <p:nvSpPr>
+          <p:cNvPr id="2" name="Text 0"/>
+          <p:cNvSpPr/>
+          <p:nvPr/>
+        </p:nvSpPr>
+        <p:spPr>
+          <a:xfrm>
+            <a:off x="548640" y="411480"/>
+            <a:ext cx="11094415" cy="594360"/>
+          </a:xfrm>
+          <a:prstGeom prst="rect">
+            <a:avLst/>
+          </a:prstGeom>
+          <a:noFill/>
+          <a:ln/>
+        </p:spPr>
+        <p:txBody>
+          <a:bodyPr wrap="square" lIns="0" tIns="0" rIns="0" bIns="0" rtlCol="0" anchor="ctr"/>
+          <a:lstStyle/>
+          <a:p>
+            <a:pPr algn="l" indent="0" marL="0">
+              <a:buNone/>
+            </a:pPr>
+            <a:r>
+              <a:rPr lang="en-US" sz="2800" b="1" dirty="0">
+                <a:solidFill>
+                  <a:srgbClr val="F2F3F5"/>
+                </a:solidFill>
+                <a:latin typeface="Cambria" pitchFamily="34" charset="0"/>
+                <a:ea typeface="Cambria" pitchFamily="34" charset="-122"/>
+                <a:cs typeface="Cambria" pitchFamily="34" charset="-120"/>
+              </a:rPr>
+              <a:t>Data &amp; Analytics</a:t>
+            </a:r>
+            <a:endParaRPr lang="en-US" sz="2800" dirty="0"/>
+          </a:p>
+        </p:txBody>
+      </p:sp>
+      <p:sp>
+        <p:nvSpPr>
+          <p:cNvPr id="3" name="Text 1"/>
+          <p:cNvSpPr/>
+          <p:nvPr/>
+        </p:nvSpPr>
+        <p:spPr>
+          <a:xfrm>
+            <a:off x="548640" y="960120"/>
+            <a:ext cx="11094415" cy="365760"/>
+          </a:xfrm>
+          <a:prstGeom prst="rect">
+            <a:avLst/>
+          </a:prstGeom>
+          <a:noFill/>
+          <a:ln/>
+        </p:spPr>
+        <p:txBody>
+          <a:bodyPr wrap="square" lIns="0" tIns="0" rIns="0" bIns="0" rtlCol="0" anchor="ctr"/>
+          <a:lstStyle/>
+          <a:p>
+            <a:pPr algn="l" indent="0" marL="0">
+              <a:buNone/>
+            </a:pPr>
+            <a:r>
+              <a:rPr lang="en-US" sz="1300" dirty="0">
+                <a:solidFill>
+                  <a:srgbClr val="A9B4C9"/>
+                </a:solidFill>
+                <a:latin typeface="Calibri" pitchFamily="34" charset="0"/>
+                <a:ea typeface="Calibri" pitchFamily="34" charset="-122"/>
+                <a:cs typeface="Calibri" pitchFamily="34" charset="-120"/>
+              </a:rPr>
+              <a:t>Editable line icons — recolor, resize, or restyle natively in PowerPoint</a:t>
+            </a:r>
+            <a:endParaRPr lang="en-US" sz="1300" dirty="0"/>
+          </a:p>
+        </p:txBody>
+      </p:sp>
+      <p:sp>
+        <p:nvSpPr>
+          <p:cNvPr id="4" name="Shape 2"/>
+          <p:cNvSpPr/>
+          <p:nvPr/>
+        </p:nvSpPr>
+        <p:spPr>
+          <a:xfrm>
+            <a:off x="986752" y="2103120"/>
+            <a:ext cx="1554480" cy="1554480"/>
+          </a:xfrm>
+          <a:prstGeom prst="ellipse">
+            <a:avLst/>
+          </a:prstGeom>
+          <a:ln w="19050">
+            <a:solidFill>
+              <a:srgbClr val="D4AF5A"/>
+            </a:solidFill>
+            <a:prstDash val="solid"/>
+          </a:ln>
+        </p:spPr>
+      </p:sp>
+      <p:sp>
+        <p:nvSpPr>
+          <p:cNvPr id="5" name="Shape 3"/>
+          <p:cNvSpPr/>
+          <p:nvPr/>
+        </p:nvSpPr>
+        <p:spPr>
+          <a:xfrm>
+            <a:off x="1404907" y="3008605"/>
+            <a:ext cx="128245" cy="235115"/>
+          </a:xfrm>
+          <a:prstGeom prst="rect">
+            <a:avLst/>
+          </a:prstGeom>
+          <a:solidFill>
+            <a:srgbClr val="D4AF5A"/>
+          </a:solidFill>
+          <a:ln/>
+        </p:spPr>
+      </p:sp>
+      <p:sp>
+        <p:nvSpPr>
+          <p:cNvPr id="6" name="Shape 4"/>
+          <p:cNvSpPr/>
+          <p:nvPr/>
+        </p:nvSpPr>
+        <p:spPr>
+          <a:xfrm>
+            <a:off x="1601549" y="2837612"/>
+            <a:ext cx="128245" cy="406108"/>
+          </a:xfrm>
+          <a:prstGeom prst="rect">
+            <a:avLst/>
+          </a:prstGeom>
+          <a:solidFill>
+            <a:srgbClr val="D4AF5A"/>
+          </a:solidFill>
+          <a:ln/>
+        </p:spPr>
+      </p:sp>
+      <p:sp>
+        <p:nvSpPr>
+          <p:cNvPr id="7" name="Shape 5"/>
+          <p:cNvSpPr/>
+          <p:nvPr/>
+        </p:nvSpPr>
+        <p:spPr>
+          <a:xfrm>
+            <a:off x="1798190" y="2944482"/>
+            <a:ext cx="128245" cy="299237"/>
+          </a:xfrm>
+          <a:prstGeom prst="rect">
+            <a:avLst/>
+          </a:prstGeom>
+          <a:solidFill>
+            <a:srgbClr val="D4AF5A"/>
+          </a:solidFill>
+          <a:ln/>
+        </p:spPr>
+      </p:sp>
+      <p:sp>
+        <p:nvSpPr>
+          <p:cNvPr id="8" name="Shape 6"/>
+          <p:cNvSpPr/>
+          <p:nvPr/>
+        </p:nvSpPr>
+        <p:spPr>
+          <a:xfrm>
+            <a:off x="1994832" y="2687993"/>
+            <a:ext cx="128245" cy="555727"/>
+          </a:xfrm>
+          <a:prstGeom prst="rect">
+            <a:avLst/>
+          </a:prstGeom>
+          <a:solidFill>
+            <a:srgbClr val="D4AF5A"/>
+          </a:solidFill>
+          <a:ln/>
+        </p:spPr>
+      </p:sp>
+      <p:sp>
+        <p:nvSpPr>
+          <p:cNvPr id="9" name="Shape 7"/>
+          <p:cNvSpPr/>
+          <p:nvPr/>
+        </p:nvSpPr>
+        <p:spPr>
+          <a:xfrm flipV="1">
+            <a:off x="1469029" y="2794864"/>
+            <a:ext cx="196642" cy="170993"/>
+          </a:xfrm>
+          <a:prstGeom prst="line">
+            <a:avLst/>
+          </a:prstGeom>
+          <a:noFill/>
+          <a:ln w="15875">
+            <a:solidFill>
+              <a:srgbClr val="D4AF5A"/>
+            </a:solidFill>
+            <a:prstDash val="solid"/>
+          </a:ln>
+        </p:spPr>
+      </p:sp>
+      <p:sp>
+        <p:nvSpPr>
+          <p:cNvPr id="10" name="Shape 8"/>
+          <p:cNvSpPr/>
+          <p:nvPr/>
+        </p:nvSpPr>
+        <p:spPr>
+          <a:xfrm>
+            <a:off x="1665671" y="2794864"/>
+            <a:ext cx="196642" cy="106871"/>
+          </a:xfrm>
+          <a:prstGeom prst="line">
+            <a:avLst/>
+          </a:prstGeom>
+          <a:noFill/>
+          <a:ln w="15875">
+            <a:solidFill>
+              <a:srgbClr val="D4AF5A"/>
+            </a:solidFill>
+            <a:prstDash val="solid"/>
+          </a:ln>
+        </p:spPr>
+      </p:sp>
+      <p:sp>
+        <p:nvSpPr>
+          <p:cNvPr id="11" name="Shape 9"/>
+          <p:cNvSpPr/>
+          <p:nvPr/>
+        </p:nvSpPr>
+        <p:spPr>
+          <a:xfrm flipV="1">
+            <a:off x="1862313" y="2645245"/>
+            <a:ext cx="196642" cy="256489"/>
+          </a:xfrm>
+          <a:prstGeom prst="line">
+            <a:avLst/>
+          </a:prstGeom>
+          <a:noFill/>
+          <a:ln w="15875">
+            <a:solidFill>
+              <a:srgbClr val="D4AF5A"/>
+            </a:solidFill>
+            <a:prstDash val="solid"/>
+          </a:ln>
+        </p:spPr>
+      </p:sp>
+      <p:sp>
+        <p:nvSpPr>
+          <p:cNvPr id="12" name="Text 10"/>
+          <p:cNvSpPr/>
+          <p:nvPr/>
+        </p:nvSpPr>
+        <p:spPr>
+          <a:xfrm>
+            <a:off x="548640" y="3886200"/>
+            <a:ext cx="2430704" cy="320040"/>
+          </a:xfrm>
+          <a:prstGeom prst="rect">
+            <a:avLst/>
+          </a:prstGeom>
+          <a:noFill/>
+          <a:ln/>
+        </p:spPr>
+        <p:txBody>
+          <a:bodyPr wrap="square" lIns="0" tIns="0" rIns="0" bIns="0" rtlCol="0" anchor="ctr"/>
+          <a:lstStyle/>
+          <a:p>
+            <a:pPr algn="ctr" indent="0" marL="0">
+              <a:buNone/>
+            </a:pPr>
+            <a:r>
+              <a:rPr lang="en-US" sz="1500" b="1" dirty="0">
+                <a:solidFill>
+                  <a:srgbClr val="F2F3F5"/>
+                </a:solidFill>
+                <a:latin typeface="Cambria" pitchFamily="34" charset="0"/>
+                <a:ea typeface="Cambria" pitchFamily="34" charset="-122"/>
+                <a:cs typeface="Cambria" pitchFamily="34" charset="-120"/>
+              </a:rPr>
+              <a:t>Analytics</a:t>
+            </a:r>
+            <a:endParaRPr lang="en-US" sz="1500" dirty="0"/>
+          </a:p>
+        </p:txBody>
+      </p:sp>
+      <p:sp>
+        <p:nvSpPr>
+          <p:cNvPr id="13" name="Text 11"/>
+          <p:cNvSpPr/>
+          <p:nvPr/>
+        </p:nvSpPr>
+        <p:spPr>
+          <a:xfrm>
+            <a:off x="640080" y="4224528"/>
+            <a:ext cx="2247824" cy="548640"/>
+          </a:xfrm>
+          <a:prstGeom prst="rect">
+            <a:avLst/>
+          </a:prstGeom>
+          <a:noFill/>
+          <a:ln/>
+        </p:spPr>
+        <p:txBody>
+          <a:bodyPr wrap="square" lIns="0" tIns="0" rIns="0" bIns="0" rtlCol="0" anchor="ctr"/>
+          <a:lstStyle/>
+          <a:p>
+            <a:pPr algn="ctr" indent="0" marL="0">
+              <a:lnSpc>
+                <a:spcPct val="120000"/>
+              </a:lnSpc>
+              <a:buNone/>
+            </a:pPr>
+            <a:r>
+              <a:rPr lang="en-US" sz="1000" i="1" dirty="0">
+                <a:solidFill>
+                  <a:srgbClr val="A9B4C9"/>
+                </a:solidFill>
+                <a:latin typeface="Calibri" pitchFamily="34" charset="0"/>
+                <a:ea typeface="Calibri" pitchFamily="34" charset="-122"/>
+                <a:cs typeface="Calibri" pitchFamily="34" charset="-120"/>
+              </a:rPr>
+              <a:t>Data · Analytics · Trends · Reporting</a:t>
+            </a:r>
+            <a:endParaRPr lang="en-US" sz="1000" dirty="0"/>
+          </a:p>
+        </p:txBody>
+      </p:sp>
+      <p:sp>
+        <p:nvSpPr>
+          <p:cNvPr id="14" name="Shape 12"/>
+          <p:cNvSpPr/>
+          <p:nvPr/>
+        </p:nvSpPr>
+        <p:spPr>
+          <a:xfrm>
+            <a:off x="3874656" y="2103120"/>
+            <a:ext cx="1554480" cy="1554480"/>
+          </a:xfrm>
+          <a:prstGeom prst="ellipse">
+            <a:avLst/>
+          </a:prstGeom>
+          <a:ln w="19050">
+            <a:solidFill>
+              <a:srgbClr val="D4AF5A"/>
+            </a:solidFill>
+            <a:prstDash val="solid"/>
+          </a:ln>
+        </p:spPr>
+      </p:sp>
+      <p:sp>
+        <p:nvSpPr>
+          <p:cNvPr id="15" name="Shape 13"/>
+          <p:cNvSpPr/>
+          <p:nvPr/>
+        </p:nvSpPr>
+        <p:spPr>
+          <a:xfrm>
+            <a:off x="4352658" y="2495626"/>
+            <a:ext cx="598475" cy="769468"/>
+          </a:xfrm>
+          <a:prstGeom prst="can">
+            <a:avLst/>
+          </a:prstGeom>
+          <a:ln w="22225">
+            <a:solidFill>
+              <a:srgbClr val="D4AF5A"/>
+            </a:solidFill>
+            <a:prstDash val="solid"/>
+          </a:ln>
+        </p:spPr>
+      </p:sp>
+      <p:sp>
+        <p:nvSpPr>
+          <p:cNvPr id="16" name="Text 14"/>
+          <p:cNvSpPr/>
+          <p:nvPr/>
+        </p:nvSpPr>
+        <p:spPr>
+          <a:xfrm>
+            <a:off x="3436544" y="3886200"/>
+            <a:ext cx="2430704" cy="320040"/>
+          </a:xfrm>
+          <a:prstGeom prst="rect">
+            <a:avLst/>
+          </a:prstGeom>
+          <a:noFill/>
+          <a:ln/>
+        </p:spPr>
+        <p:txBody>
+          <a:bodyPr wrap="square" lIns="0" tIns="0" rIns="0" bIns="0" rtlCol="0" anchor="ctr"/>
+          <a:lstStyle/>
+          <a:p>
+            <a:pPr algn="ctr" indent="0" marL="0">
+              <a:buNone/>
+            </a:pPr>
+            <a:r>
+              <a:rPr lang="en-US" sz="1500" b="1" dirty="0">
+                <a:solidFill>
+                  <a:srgbClr val="F2F3F5"/>
+                </a:solidFill>
+                <a:latin typeface="Cambria" pitchFamily="34" charset="0"/>
+                <a:ea typeface="Cambria" pitchFamily="34" charset="-122"/>
+                <a:cs typeface="Cambria" pitchFamily="34" charset="-120"/>
+              </a:rPr>
+              <a:t>Database</a:t>
+            </a:r>
+            <a:endParaRPr lang="en-US" sz="1500" dirty="0"/>
+          </a:p>
+        </p:txBody>
+      </p:sp>
+      <p:sp>
+        <p:nvSpPr>
+          <p:cNvPr id="17" name="Text 15"/>
+          <p:cNvSpPr/>
+          <p:nvPr/>
+        </p:nvSpPr>
+        <p:spPr>
+          <a:xfrm>
+            <a:off x="3527984" y="4224528"/>
+            <a:ext cx="2247824" cy="548640"/>
+          </a:xfrm>
+          <a:prstGeom prst="rect">
+            <a:avLst/>
+          </a:prstGeom>
+          <a:noFill/>
+          <a:ln/>
+        </p:spPr>
+        <p:txBody>
+          <a:bodyPr wrap="square" lIns="0" tIns="0" rIns="0" bIns="0" rtlCol="0" anchor="ctr"/>
+          <a:lstStyle/>
+          <a:p>
+            <a:pPr algn="ctr" indent="0" marL="0">
+              <a:lnSpc>
+                <a:spcPct val="120000"/>
+              </a:lnSpc>
+              <a:buNone/>
+            </a:pPr>
+            <a:r>
+              <a:rPr lang="en-US" sz="1000" i="1" dirty="0">
+                <a:solidFill>
+                  <a:srgbClr val="A9B4C9"/>
+                </a:solidFill>
+                <a:latin typeface="Calibri" pitchFamily="34" charset="0"/>
+                <a:ea typeface="Calibri" pitchFamily="34" charset="-122"/>
+                <a:cs typeface="Calibri" pitchFamily="34" charset="-120"/>
+              </a:rPr>
+              <a:t>Database · Storage · Records</a:t>
+            </a:r>
+            <a:endParaRPr lang="en-US" sz="1000" dirty="0"/>
+          </a:p>
+        </p:txBody>
+      </p:sp>
+      <p:sp>
+        <p:nvSpPr>
+          <p:cNvPr id="18" name="Shape 16"/>
+          <p:cNvSpPr/>
+          <p:nvPr/>
+        </p:nvSpPr>
+        <p:spPr>
+          <a:xfrm>
+            <a:off x="6762560" y="2103120"/>
+            <a:ext cx="1554480" cy="1554480"/>
+          </a:xfrm>
+          <a:prstGeom prst="ellipse">
+            <a:avLst/>
+          </a:prstGeom>
+          <a:ln w="19050">
+            <a:solidFill>
+              <a:srgbClr val="D4AF5A"/>
+            </a:solidFill>
+            <a:prstDash val="solid"/>
+          </a:ln>
+        </p:spPr>
+      </p:sp>
+      <p:sp>
+        <p:nvSpPr>
+          <p:cNvPr id="19" name="Shape 17"/>
+          <p:cNvSpPr/>
+          <p:nvPr/>
+        </p:nvSpPr>
+        <p:spPr>
+          <a:xfrm>
+            <a:off x="7133692" y="2559749"/>
+            <a:ext cx="812216" cy="641223"/>
+          </a:xfrm>
+          <a:prstGeom prst="roundRect">
+            <a:avLst>
+              <a:gd name="adj" fmla="val 11408"/>
+            </a:avLst>
+          </a:prstGeom>
+          <a:ln w="22225">
+            <a:solidFill>
+              <a:srgbClr val="D4AF5A"/>
+            </a:solidFill>
+            <a:prstDash val="solid"/>
+          </a:ln>
+        </p:spPr>
+      </p:sp>
+      <p:sp>
+        <p:nvSpPr>
+          <p:cNvPr id="20" name="Shape 18"/>
+          <p:cNvSpPr/>
+          <p:nvPr/>
+        </p:nvSpPr>
+        <p:spPr>
+          <a:xfrm>
+            <a:off x="7283310" y="2730741"/>
+            <a:ext cx="341986" cy="341986"/>
+          </a:xfrm>
+          <a:prstGeom prst="pie">
+            <a:avLst>
+              <a:gd name="adj1" fmla="val 16200000"/>
+              <a:gd name="adj2" fmla="val 5400000"/>
+            </a:avLst>
+          </a:prstGeom>
+          <a:ln w="15875">
+            <a:solidFill>
+              <a:srgbClr val="D4AF5A"/>
+            </a:solidFill>
+            <a:prstDash val="solid"/>
+          </a:ln>
+        </p:spPr>
+      </p:sp>
+      <p:sp>
+        <p:nvSpPr>
+          <p:cNvPr id="21" name="Text 19"/>
+          <p:cNvSpPr/>
+          <p:nvPr/>
+        </p:nvSpPr>
+        <p:spPr>
+          <a:xfrm>
+            <a:off x="6324448" y="3886200"/>
+            <a:ext cx="2430704" cy="320040"/>
+          </a:xfrm>
+          <a:prstGeom prst="rect">
+            <a:avLst/>
+          </a:prstGeom>
+          <a:noFill/>
+          <a:ln/>
+        </p:spPr>
+        <p:txBody>
+          <a:bodyPr wrap="square" lIns="0" tIns="0" rIns="0" bIns="0" rtlCol="0" anchor="ctr"/>
+          <a:lstStyle/>
+          <a:p>
+            <a:pPr algn="ctr" indent="0" marL="0">
+              <a:buNone/>
+            </a:pPr>
+            <a:r>
+              <a:rPr lang="en-US" sz="1500" b="1" dirty="0">
+                <a:solidFill>
+                  <a:srgbClr val="F2F3F5"/>
+                </a:solidFill>
+                <a:latin typeface="Cambria" pitchFamily="34" charset="0"/>
+                <a:ea typeface="Cambria" pitchFamily="34" charset="-122"/>
+                <a:cs typeface="Cambria" pitchFamily="34" charset="-120"/>
+              </a:rPr>
+              <a:t>Dashboard</a:t>
+            </a:r>
+            <a:endParaRPr lang="en-US" sz="1500" dirty="0"/>
+          </a:p>
+        </p:txBody>
+      </p:sp>
+      <p:sp>
+        <p:nvSpPr>
+          <p:cNvPr id="22" name="Text 20"/>
+          <p:cNvSpPr/>
+          <p:nvPr/>
+        </p:nvSpPr>
+        <p:spPr>
+          <a:xfrm>
+            <a:off x="6415888" y="4224528"/>
+            <a:ext cx="2247824" cy="548640"/>
+          </a:xfrm>
+          <a:prstGeom prst="rect">
+            <a:avLst/>
+          </a:prstGeom>
+          <a:noFill/>
+          <a:ln/>
+        </p:spPr>
+        <p:txBody>
+          <a:bodyPr wrap="square" lIns="0" tIns="0" rIns="0" bIns="0" rtlCol="0" anchor="ctr"/>
+          <a:lstStyle/>
+          <a:p>
+            <a:pPr algn="ctr" indent="0" marL="0">
+              <a:lnSpc>
+                <a:spcPct val="120000"/>
+              </a:lnSpc>
+              <a:buNone/>
+            </a:pPr>
+            <a:r>
+              <a:rPr lang="en-US" sz="1000" i="1" dirty="0">
+                <a:solidFill>
+                  <a:srgbClr val="A9B4C9"/>
+                </a:solidFill>
+                <a:latin typeface="Calibri" pitchFamily="34" charset="0"/>
+                <a:ea typeface="Calibri" pitchFamily="34" charset="-122"/>
+                <a:cs typeface="Calibri" pitchFamily="34" charset="-120"/>
+              </a:rPr>
+              <a:t>Dashboard · KPI · Visualization</a:t>
+            </a:r>
+            <a:endParaRPr lang="en-US" sz="1000" dirty="0"/>
+          </a:p>
+        </p:txBody>
+      </p:sp>
+      <p:sp>
+        <p:nvSpPr>
+          <p:cNvPr id="23" name="Shape 21"/>
+          <p:cNvSpPr/>
+          <p:nvPr/>
+        </p:nvSpPr>
+        <p:spPr>
+          <a:xfrm>
+            <a:off x="9650463" y="2103120"/>
+            <a:ext cx="1554480" cy="1554480"/>
+          </a:xfrm>
+          <a:prstGeom prst="ellipse">
+            <a:avLst/>
+          </a:prstGeom>
+          <a:ln w="19050">
+            <a:solidFill>
+              <a:srgbClr val="D4AF5A"/>
+            </a:solidFill>
+            <a:prstDash val="solid"/>
+          </a:ln>
+        </p:spPr>
+      </p:sp>
+      <p:sp>
+        <p:nvSpPr>
+          <p:cNvPr id="24" name="Shape 22"/>
+          <p:cNvSpPr/>
+          <p:nvPr/>
+        </p:nvSpPr>
+        <p:spPr>
+          <a:xfrm>
+            <a:off x="10064344" y="2576848"/>
+            <a:ext cx="726719" cy="136794"/>
+          </a:xfrm>
+          <a:prstGeom prst="roundRect">
+            <a:avLst>
+              <a:gd name="adj" fmla="val 200535"/>
+            </a:avLst>
+          </a:prstGeom>
+          <a:ln w="19050">
+            <a:solidFill>
+              <a:srgbClr val="D4AF5A"/>
+            </a:solidFill>
+            <a:prstDash val="solid"/>
+          </a:ln>
+        </p:spPr>
+      </p:sp>
+      <p:sp>
+        <p:nvSpPr>
+          <p:cNvPr id="25" name="Shape 23"/>
+          <p:cNvSpPr/>
+          <p:nvPr/>
+        </p:nvSpPr>
+        <p:spPr>
+          <a:xfrm>
+            <a:off x="10064344" y="2811963"/>
+            <a:ext cx="726719" cy="136794"/>
+          </a:xfrm>
+          <a:prstGeom prst="roundRect">
+            <a:avLst>
+              <a:gd name="adj" fmla="val 200535"/>
+            </a:avLst>
+          </a:prstGeom>
+          <a:ln w="19050">
+            <a:solidFill>
+              <a:srgbClr val="D4AF5A"/>
+            </a:solidFill>
+            <a:prstDash val="solid"/>
+          </a:ln>
+        </p:spPr>
+      </p:sp>
+      <p:sp>
+        <p:nvSpPr>
+          <p:cNvPr id="26" name="Shape 24"/>
+          <p:cNvSpPr/>
+          <p:nvPr/>
+        </p:nvSpPr>
+        <p:spPr>
+          <a:xfrm>
+            <a:off x="10064344" y="3047078"/>
+            <a:ext cx="726719" cy="136794"/>
+          </a:xfrm>
+          <a:prstGeom prst="roundRect">
+            <a:avLst>
+              <a:gd name="adj" fmla="val 200535"/>
+            </a:avLst>
+          </a:prstGeom>
+          <a:ln w="19050">
+            <a:solidFill>
+              <a:srgbClr val="D4AF5A"/>
+            </a:solidFill>
+            <a:prstDash val="solid"/>
+          </a:ln>
+        </p:spPr>
+      </p:sp>
+      <p:sp>
+        <p:nvSpPr>
+          <p:cNvPr id="27" name="Text 25"/>
+          <p:cNvSpPr/>
+          <p:nvPr/>
+        </p:nvSpPr>
+        <p:spPr>
+          <a:xfrm>
+            <a:off x="9212351" y="3886200"/>
+            <a:ext cx="2430704" cy="320040"/>
+          </a:xfrm>
+          <a:prstGeom prst="rect">
+            <a:avLst/>
+          </a:prstGeom>
+          <a:noFill/>
+          <a:ln/>
+        </p:spPr>
+        <p:txBody>
+          <a:bodyPr wrap="square" lIns="0" tIns="0" rIns="0" bIns="0" rtlCol="0" anchor="ctr"/>
+          <a:lstStyle/>
+          <a:p>
+            <a:pPr algn="ctr" indent="0" marL="0">
+              <a:buNone/>
+            </a:pPr>
+            <a:r>
+              <a:rPr lang="en-US" sz="1500" b="1" dirty="0">
+                <a:solidFill>
+                  <a:srgbClr val="F2F3F5"/>
+                </a:solidFill>
+                <a:latin typeface="Cambria" pitchFamily="34" charset="0"/>
+                <a:ea typeface="Cambria" pitchFamily="34" charset="-122"/>
+                <a:cs typeface="Cambria" pitchFamily="34" charset="-120"/>
+              </a:rPr>
+              <a:t>Governance</a:t>
+            </a:r>
+            <a:endParaRPr lang="en-US" sz="1500" dirty="0"/>
+          </a:p>
+        </p:txBody>
+      </p:sp>
+      <p:sp>
+        <p:nvSpPr>
+          <p:cNvPr id="28" name="Text 26"/>
+          <p:cNvSpPr/>
+          <p:nvPr/>
+        </p:nvSpPr>
+        <p:spPr>
+          <a:xfrm>
+            <a:off x="9303791" y="4224528"/>
+            <a:ext cx="2247824" cy="548640"/>
+          </a:xfrm>
+          <a:prstGeom prst="rect">
+            <a:avLst/>
+          </a:prstGeom>
+          <a:noFill/>
+          <a:ln/>
+        </p:spPr>
+        <p:txBody>
+          <a:bodyPr wrap="square" lIns="0" tIns="0" rIns="0" bIns="0" rtlCol="0" anchor="ctr"/>
+          <a:lstStyle/>
+          <a:p>
+            <a:pPr algn="ctr" indent="0" marL="0">
+              <a:lnSpc>
+                <a:spcPct val="120000"/>
+              </a:lnSpc>
+              <a:buNone/>
+            </a:pPr>
+            <a:r>
+              <a:rPr lang="en-US" sz="1000" i="1" dirty="0">
+                <a:solidFill>
+                  <a:srgbClr val="A9B4C9"/>
+                </a:solidFill>
+                <a:latin typeface="Calibri" pitchFamily="34" charset="0"/>
+                <a:ea typeface="Calibri" pitchFamily="34" charset="-122"/>
+                <a:cs typeface="Calibri" pitchFamily="34" charset="-120"/>
+              </a:rPr>
+              <a:t>Data Governance · Layers · Records</a:t>
+            </a:r>
+            <a:endParaRPr lang="en-US" sz="1000" dirty="0"/>
+          </a:p>
+        </p:txBody>
+      </p:sp>
+      <p:sp>
+        <p:nvSpPr>
+          <p:cNvPr id="25" name="Slide Number Placeholder 0"/>
+          <p:cNvSpPr>
+            <a:spLocks noGrp="1"/>
+          </p:cNvSpPr>
+          <p:nvPr>
+            <p:ph type="sldNum" sz="quarter" idx="4294967295"/>
+          </p:nvPr>
+        </p:nvSpPr>
+        <p:spPr>
+          <a:xfrm>
+            <a:off x="10728655" y="6446520"/>
+            <a:ext cx="800000" cy="300000"/>
+          </a:xfrm>
+          <a:prstGeom prst="rect">
+            <a:avLst/>
+          </a:prstGeom>
+          <a:extLst>
+            <a:ext uri="{C572A759-6A51-4108-AA02-DFA0A04FC94B}">
+              <ma14:wrappingTextBoxFlag xmlns:ma14="http://schemas.microsoft.com/office/mac/drawingml/2011/main" val="0"/>
+            </a:ext>
+          </a:extLst>
+        </p:spPr>
+        <p:txBody>
+          <a:bodyPr/>
+          <a:lstStyle>
+            <a:lvl1pPr>
+              <a:defRPr sz="1000">
+                <a:solidFill>
+                  <a:srgbClr val="A9B4C9"/>
+                </a:solidFill>
+                <a:latin typeface="Calibri"/>
+                <a:ea typeface="Calibri"/>
+                <a:cs typeface="Calibri"/>
+              </a:defRPr>
+            </a:lvl1pPr>
+          </a:lstStyle>
+          <a:p>
+            <a:pPr algn="r"/>
+            <a:fld id="{F7021451-1387-4CA6-816F-3879F97B5CBC}" type="slidenum">
+              <a:rPr b="0" lang="en-US"/>
+              <a:t>21</a:t>
+            </a:fld>
+            <a:endParaRPr lang="en-US"/>
+          </a:p>
+        </p:txBody>
+      </p:sp>
+    </p:spTree>
+  </p:cSld>
+  <p:clrMapOvr>
+    <a:masterClrMapping/>
+  </p:clrMapOvr>
+</p:sld>
+</file>
+
+<file path=ppt/slides/slide22.xml><?xml version="1.0" encoding="utf-8"?>
+<p:sld xmlns:a="http://schemas.openxmlformats.org/drawingml/2006/main" xmlns:r="http://schemas.openxmlformats.org/officeDocument/2006/relationships" xmlns:p="http://schemas.openxmlformats.org/presentationml/2006/main">
+  <p:cSld name="Slide 22">
+    <p:spTree>
+      <p:nvGrpSpPr>
+        <p:cNvPr id="1" name=""/>
+        <p:cNvGrpSpPr/>
+        <p:nvPr/>
+      </p:nvGrpSpPr>
+      <p:grpSpPr>
+        <a:xfrm>
+          <a:off x="0" y="0"/>
+          <a:ext cx="0" cy="0"/>
+          <a:chOff x="0" y="0"/>
+          <a:chExt cx="0" cy="0"/>
+        </a:xfrm>
+      </p:grpSpPr>
+      <p:sp>
+        <p:nvSpPr>
+          <p:cNvPr id="2" name="Text 0"/>
+          <p:cNvSpPr/>
+          <p:nvPr/>
+        </p:nvSpPr>
+        <p:spPr>
+          <a:xfrm>
+            <a:off x="548640" y="411480"/>
+            <a:ext cx="11094415" cy="594360"/>
+          </a:xfrm>
+          <a:prstGeom prst="rect">
+            <a:avLst/>
+          </a:prstGeom>
+          <a:noFill/>
+          <a:ln/>
+        </p:spPr>
+        <p:txBody>
+          <a:bodyPr wrap="square" lIns="0" tIns="0" rIns="0" bIns="0" rtlCol="0" anchor="ctr"/>
+          <a:lstStyle/>
+          <a:p>
+            <a:pPr algn="l" indent="0" marL="0">
+              <a:buNone/>
+            </a:pPr>
+            <a:r>
+              <a:rPr lang="en-US" sz="2800" b="1" dirty="0">
+                <a:solidFill>
+                  <a:srgbClr val="F2F3F5"/>
+                </a:solidFill>
+                <a:latin typeface="Cambria" pitchFamily="34" charset="0"/>
+                <a:ea typeface="Cambria" pitchFamily="34" charset="-122"/>
+                <a:cs typeface="Cambria" pitchFamily="34" charset="-120"/>
+              </a:rPr>
+              <a:t>Digital Transformation</a:t>
+            </a:r>
+            <a:endParaRPr lang="en-US" sz="2800" dirty="0"/>
+          </a:p>
+        </p:txBody>
+      </p:sp>
+      <p:sp>
+        <p:nvSpPr>
+          <p:cNvPr id="3" name="Text 1"/>
+          <p:cNvSpPr/>
+          <p:nvPr/>
+        </p:nvSpPr>
+        <p:spPr>
+          <a:xfrm>
+            <a:off x="548640" y="960120"/>
+            <a:ext cx="11094415" cy="365760"/>
+          </a:xfrm>
+          <a:prstGeom prst="rect">
+            <a:avLst/>
+          </a:prstGeom>
+          <a:noFill/>
+          <a:ln/>
+        </p:spPr>
+        <p:txBody>
+          <a:bodyPr wrap="square" lIns="0" tIns="0" rIns="0" bIns="0" rtlCol="0" anchor="ctr"/>
+          <a:lstStyle/>
+          <a:p>
+            <a:pPr algn="l" indent="0" marL="0">
+              <a:buNone/>
+            </a:pPr>
+            <a:r>
+              <a:rPr lang="en-US" sz="1300" dirty="0">
+                <a:solidFill>
+                  <a:srgbClr val="A9B4C9"/>
+                </a:solidFill>
+                <a:latin typeface="Calibri" pitchFamily="34" charset="0"/>
+                <a:ea typeface="Calibri" pitchFamily="34" charset="-122"/>
+                <a:cs typeface="Calibri" pitchFamily="34" charset="-120"/>
+              </a:rPr>
+              <a:t>Editable line icons — recolor, resize, or restyle natively in PowerPoint</a:t>
+            </a:r>
+            <a:endParaRPr lang="en-US" sz="1300" dirty="0"/>
+          </a:p>
+        </p:txBody>
+      </p:sp>
+      <p:sp>
+        <p:nvSpPr>
+          <p:cNvPr id="4" name="Shape 2"/>
+          <p:cNvSpPr/>
+          <p:nvPr/>
+        </p:nvSpPr>
+        <p:spPr>
+          <a:xfrm>
+            <a:off x="986752" y="2103120"/>
+            <a:ext cx="1554480" cy="1554480"/>
+          </a:xfrm>
+          <a:prstGeom prst="ellipse">
+            <a:avLst/>
+          </a:prstGeom>
+          <a:ln w="19050">
+            <a:solidFill>
+              <a:srgbClr val="D4AF5A"/>
+            </a:solidFill>
+            <a:prstDash val="solid"/>
+          </a:ln>
+        </p:spPr>
+      </p:sp>
+      <p:sp>
+        <p:nvSpPr>
+          <p:cNvPr id="5" name="Shape 3"/>
+          <p:cNvSpPr/>
+          <p:nvPr/>
+        </p:nvSpPr>
+        <p:spPr>
+          <a:xfrm flipV="1">
+            <a:off x="1400632" y="2517000"/>
+            <a:ext cx="363360" cy="577101"/>
+          </a:xfrm>
+          <a:prstGeom prst="line">
+            <a:avLst/>
+          </a:prstGeom>
+          <a:noFill/>
+          <a:ln w="15875">
+            <a:solidFill>
+              <a:srgbClr val="D4AF5A"/>
+            </a:solidFill>
+            <a:prstDash val="solid"/>
+          </a:ln>
+        </p:spPr>
+      </p:sp>
+      <p:sp>
+        <p:nvSpPr>
+          <p:cNvPr id="6" name="Shape 4"/>
+          <p:cNvSpPr/>
+          <p:nvPr/>
+        </p:nvSpPr>
+        <p:spPr>
+          <a:xfrm>
+            <a:off x="1400632" y="3094101"/>
+            <a:ext cx="726719" cy="914"/>
+          </a:xfrm>
+          <a:prstGeom prst="line">
+            <a:avLst/>
+          </a:prstGeom>
+          <a:noFill/>
+          <a:ln w="15875">
+            <a:solidFill>
+              <a:srgbClr val="D4AF5A"/>
+            </a:solidFill>
+            <a:prstDash val="solid"/>
+          </a:ln>
+        </p:spPr>
+      </p:sp>
+      <p:sp>
+        <p:nvSpPr>
+          <p:cNvPr id="7" name="Shape 5"/>
+          <p:cNvSpPr/>
+          <p:nvPr/>
+        </p:nvSpPr>
+        <p:spPr>
+          <a:xfrm>
+            <a:off x="1763992" y="2517000"/>
+            <a:ext cx="363360" cy="577101"/>
+          </a:xfrm>
+          <a:prstGeom prst="line">
+            <a:avLst/>
+          </a:prstGeom>
+          <a:noFill/>
+          <a:ln w="15875">
+            <a:solidFill>
+              <a:srgbClr val="D4AF5A"/>
+            </a:solidFill>
+            <a:prstDash val="solid"/>
+          </a:ln>
+        </p:spPr>
+      </p:sp>
+      <p:sp>
+        <p:nvSpPr>
+          <p:cNvPr id="8" name="Shape 6"/>
+          <p:cNvSpPr/>
+          <p:nvPr/>
+        </p:nvSpPr>
+        <p:spPr>
+          <a:xfrm>
+            <a:off x="1687045" y="2440054"/>
+            <a:ext cx="153894" cy="153894"/>
+          </a:xfrm>
+          <a:prstGeom prst="ellipse">
+            <a:avLst/>
+          </a:prstGeom>
+          <a:ln w="19050">
+            <a:solidFill>
+              <a:srgbClr val="D4AF5A"/>
+            </a:solidFill>
+            <a:prstDash val="solid"/>
+          </a:ln>
+        </p:spPr>
+      </p:sp>
+      <p:sp>
+        <p:nvSpPr>
+          <p:cNvPr id="9" name="Shape 7"/>
+          <p:cNvSpPr/>
+          <p:nvPr/>
+        </p:nvSpPr>
+        <p:spPr>
+          <a:xfrm>
+            <a:off x="1323685" y="3017154"/>
+            <a:ext cx="153894" cy="153894"/>
+          </a:xfrm>
+          <a:prstGeom prst="ellipse">
+            <a:avLst/>
+          </a:prstGeom>
+          <a:ln w="19050">
+            <a:solidFill>
+              <a:srgbClr val="D4AF5A"/>
+            </a:solidFill>
+            <a:prstDash val="solid"/>
+          </a:ln>
+        </p:spPr>
+      </p:sp>
+      <p:sp>
+        <p:nvSpPr>
+          <p:cNvPr id="10" name="Shape 8"/>
+          <p:cNvSpPr/>
+          <p:nvPr/>
+        </p:nvSpPr>
+        <p:spPr>
+          <a:xfrm>
+            <a:off x="2050405" y="3017154"/>
+            <a:ext cx="153894" cy="153894"/>
+          </a:xfrm>
+          <a:prstGeom prst="ellipse">
+            <a:avLst/>
+          </a:prstGeom>
+          <a:ln w="19050">
+            <a:solidFill>
+              <a:srgbClr val="D4AF5A"/>
+            </a:solidFill>
+            <a:prstDash val="solid"/>
+          </a:ln>
+        </p:spPr>
+      </p:sp>
+      <p:sp>
+        <p:nvSpPr>
+          <p:cNvPr id="11" name="Text 9"/>
+          <p:cNvSpPr/>
+          <p:nvPr/>
+        </p:nvSpPr>
+        <p:spPr>
+          <a:xfrm>
+            <a:off x="548640" y="3886200"/>
+            <a:ext cx="2430704" cy="320040"/>
+          </a:xfrm>
+          <a:prstGeom prst="rect">
+            <a:avLst/>
+          </a:prstGeom>
+          <a:noFill/>
+          <a:ln/>
+        </p:spPr>
+        <p:txBody>
+          <a:bodyPr wrap="square" lIns="0" tIns="0" rIns="0" bIns="0" rtlCol="0" anchor="ctr"/>
+          <a:lstStyle/>
+          <a:p>
+            <a:pPr algn="ctr" indent="0" marL="0">
+              <a:buNone/>
+            </a:pPr>
+            <a:r>
+              <a:rPr lang="en-US" sz="1500" b="1" dirty="0">
+                <a:solidFill>
+                  <a:srgbClr val="F2F3F5"/>
+                </a:solidFill>
+                <a:latin typeface="Cambria" pitchFamily="34" charset="0"/>
+                <a:ea typeface="Cambria" pitchFamily="34" charset="-122"/>
+                <a:cs typeface="Cambria" pitchFamily="34" charset="-120"/>
+              </a:rPr>
+              <a:t>Ecosystem</a:t>
+            </a:r>
+            <a:endParaRPr lang="en-US" sz="1500" dirty="0"/>
+          </a:p>
+        </p:txBody>
+      </p:sp>
+      <p:sp>
+        <p:nvSpPr>
+          <p:cNvPr id="12" name="Text 10"/>
+          <p:cNvSpPr/>
+          <p:nvPr/>
+        </p:nvSpPr>
+        <p:spPr>
+          <a:xfrm>
+            <a:off x="640080" y="4224528"/>
+            <a:ext cx="2247824" cy="548640"/>
+          </a:xfrm>
+          <a:prstGeom prst="rect">
+            <a:avLst/>
+          </a:prstGeom>
+          <a:noFill/>
+          <a:ln/>
+        </p:spPr>
+        <p:txBody>
+          <a:bodyPr wrap="square" lIns="0" tIns="0" rIns="0" bIns="0" rtlCol="0" anchor="ctr"/>
+          <a:lstStyle/>
+          <a:p>
+            <a:pPr algn="ctr" indent="0" marL="0">
+              <a:lnSpc>
+                <a:spcPct val="120000"/>
+              </a:lnSpc>
+              <a:buNone/>
+            </a:pPr>
+            <a:r>
+              <a:rPr lang="en-US" sz="1000" i="1" dirty="0">
+                <a:solidFill>
+                  <a:srgbClr val="A9B4C9"/>
+                </a:solidFill>
+                <a:latin typeface="Calibri" pitchFamily="34" charset="0"/>
+                <a:ea typeface="Calibri" pitchFamily="34" charset="-122"/>
+                <a:cs typeface="Calibri" pitchFamily="34" charset="-120"/>
+              </a:rPr>
+              <a:t>Digital Thread · Connectivity · IoT</a:t>
+            </a:r>
+            <a:endParaRPr lang="en-US" sz="1000" dirty="0"/>
+          </a:p>
+        </p:txBody>
+      </p:sp>
+      <p:sp>
+        <p:nvSpPr>
+          <p:cNvPr id="13" name="Shape 11"/>
+          <p:cNvSpPr/>
+          <p:nvPr/>
+        </p:nvSpPr>
+        <p:spPr>
+          <a:xfrm>
+            <a:off x="3874656" y="2103120"/>
+            <a:ext cx="1554480" cy="1554480"/>
+          </a:xfrm>
+          <a:prstGeom prst="ellipse">
+            <a:avLst/>
+          </a:prstGeom>
+          <a:ln w="19050">
+            <a:solidFill>
+              <a:srgbClr val="D4AF5A"/>
+            </a:solidFill>
+            <a:prstDash val="solid"/>
+          </a:ln>
+        </p:spPr>
+      </p:sp>
+      <p:sp>
+        <p:nvSpPr>
+          <p:cNvPr id="14" name="Shape 12"/>
+          <p:cNvSpPr/>
+          <p:nvPr/>
+        </p:nvSpPr>
+        <p:spPr>
+          <a:xfrm>
+            <a:off x="4288536" y="2517000"/>
+            <a:ext cx="726719" cy="726719"/>
+          </a:xfrm>
+          <a:prstGeom prst="circularArrow">
+            <a:avLst/>
+          </a:prstGeom>
+          <a:solidFill>
+            <a:srgbClr val="D4AF5A"/>
+          </a:solidFill>
+          <a:ln/>
+        </p:spPr>
+      </p:sp>
+      <p:sp>
+        <p:nvSpPr>
+          <p:cNvPr id="15" name="Text 13"/>
+          <p:cNvSpPr/>
+          <p:nvPr/>
+        </p:nvSpPr>
+        <p:spPr>
+          <a:xfrm>
+            <a:off x="3436544" y="3886200"/>
+            <a:ext cx="2430704" cy="320040"/>
+          </a:xfrm>
+          <a:prstGeom prst="rect">
+            <a:avLst/>
+          </a:prstGeom>
+          <a:noFill/>
+          <a:ln/>
+        </p:spPr>
+        <p:txBody>
+          <a:bodyPr wrap="square" lIns="0" tIns="0" rIns="0" bIns="0" rtlCol="0" anchor="ctr"/>
+          <a:lstStyle/>
+          <a:p>
+            <a:pPr algn="ctr" indent="0" marL="0">
+              <a:buNone/>
+            </a:pPr>
+            <a:r>
+              <a:rPr lang="en-US" sz="1500" b="1" dirty="0">
+                <a:solidFill>
+                  <a:srgbClr val="F2F3F5"/>
+                </a:solidFill>
+                <a:latin typeface="Cambria" pitchFamily="34" charset="0"/>
+                <a:ea typeface="Cambria" pitchFamily="34" charset="-122"/>
+                <a:cs typeface="Cambria" pitchFamily="34" charset="-120"/>
+              </a:rPr>
+              <a:t>Transformation</a:t>
+            </a:r>
+            <a:endParaRPr lang="en-US" sz="1500" dirty="0"/>
+          </a:p>
+        </p:txBody>
+      </p:sp>
+      <p:sp>
+        <p:nvSpPr>
+          <p:cNvPr id="16" name="Text 14"/>
+          <p:cNvSpPr/>
+          <p:nvPr/>
+        </p:nvSpPr>
+        <p:spPr>
+          <a:xfrm>
+            <a:off x="3527984" y="4224528"/>
+            <a:ext cx="2247824" cy="548640"/>
+          </a:xfrm>
+          <a:prstGeom prst="rect">
+            <a:avLst/>
+          </a:prstGeom>
+          <a:noFill/>
+          <a:ln/>
+        </p:spPr>
+        <p:txBody>
+          <a:bodyPr wrap="square" lIns="0" tIns="0" rIns="0" bIns="0" rtlCol="0" anchor="ctr"/>
+          <a:lstStyle/>
+          <a:p>
+            <a:pPr algn="ctr" indent="0" marL="0">
+              <a:lnSpc>
+                <a:spcPct val="120000"/>
+              </a:lnSpc>
+              <a:buNone/>
+            </a:pPr>
+            <a:r>
+              <a:rPr lang="en-US" sz="1000" i="1" dirty="0">
+                <a:solidFill>
+                  <a:srgbClr val="A9B4C9"/>
+                </a:solidFill>
+                <a:latin typeface="Calibri" pitchFamily="34" charset="0"/>
+                <a:ea typeface="Calibri" pitchFamily="34" charset="-122"/>
+                <a:cs typeface="Calibri" pitchFamily="34" charset="-120"/>
+              </a:rPr>
+              <a:t>Digital Transformation · Change · Modernization</a:t>
+            </a:r>
+            <a:endParaRPr lang="en-US" sz="1000" dirty="0"/>
+          </a:p>
+        </p:txBody>
+      </p:sp>
+      <p:sp>
+        <p:nvSpPr>
+          <p:cNvPr id="17" name="Shape 15"/>
+          <p:cNvSpPr/>
+          <p:nvPr/>
+        </p:nvSpPr>
+        <p:spPr>
+          <a:xfrm>
+            <a:off x="6762560" y="2103120"/>
+            <a:ext cx="1554480" cy="1554480"/>
+          </a:xfrm>
+          <a:prstGeom prst="ellipse">
+            <a:avLst/>
+          </a:prstGeom>
+          <a:ln w="19050">
+            <a:solidFill>
+              <a:srgbClr val="D4AF5A"/>
+            </a:solidFill>
+            <a:prstDash val="solid"/>
+          </a:ln>
+        </p:spPr>
+      </p:sp>
+      <p:sp>
+        <p:nvSpPr>
+          <p:cNvPr id="18" name="Shape 16"/>
+          <p:cNvSpPr/>
+          <p:nvPr/>
+        </p:nvSpPr>
+        <p:spPr>
+          <a:xfrm>
+            <a:off x="7155066" y="2645245"/>
+            <a:ext cx="769468" cy="470230"/>
+          </a:xfrm>
+          <a:prstGeom prst="cloud">
+            <a:avLst/>
+          </a:prstGeom>
+          <a:ln w="22225">
+            <a:solidFill>
+              <a:srgbClr val="D4AF5A"/>
+            </a:solidFill>
+            <a:prstDash val="solid"/>
+          </a:ln>
+        </p:spPr>
+      </p:sp>
+      <p:sp>
+        <p:nvSpPr>
+          <p:cNvPr id="19" name="Shape 17"/>
+          <p:cNvSpPr/>
+          <p:nvPr/>
+        </p:nvSpPr>
+        <p:spPr>
+          <a:xfrm>
+            <a:off x="7471402" y="2816238"/>
+            <a:ext cx="136794" cy="277863"/>
+          </a:xfrm>
+          <a:prstGeom prst="upArrow">
+            <a:avLst/>
+          </a:prstGeom>
+          <a:solidFill>
+            <a:srgbClr val="D4AF5A"/>
+          </a:solidFill>
+          <a:ln/>
+        </p:spPr>
+      </p:sp>
+      <p:sp>
+        <p:nvSpPr>
+          <p:cNvPr id="20" name="Text 18"/>
+          <p:cNvSpPr/>
+          <p:nvPr/>
+        </p:nvSpPr>
+        <p:spPr>
+          <a:xfrm>
+            <a:off x="6324448" y="3886200"/>
+            <a:ext cx="2430704" cy="320040"/>
+          </a:xfrm>
+          <a:prstGeom prst="rect">
+            <a:avLst/>
+          </a:prstGeom>
+          <a:noFill/>
+          <a:ln/>
+        </p:spPr>
+        <p:txBody>
+          <a:bodyPr wrap="square" lIns="0" tIns="0" rIns="0" bIns="0" rtlCol="0" anchor="ctr"/>
+          <a:lstStyle/>
+          <a:p>
+            <a:pPr algn="ctr" indent="0" marL="0">
+              <a:buNone/>
+            </a:pPr>
+            <a:r>
+              <a:rPr lang="en-US" sz="1500" b="1" dirty="0">
+                <a:solidFill>
+                  <a:srgbClr val="F2F3F5"/>
+                </a:solidFill>
+                <a:latin typeface="Cambria" pitchFamily="34" charset="0"/>
+                <a:ea typeface="Cambria" pitchFamily="34" charset="-122"/>
+                <a:cs typeface="Cambria" pitchFamily="34" charset="-120"/>
+              </a:rPr>
+              <a:t>Cloud Migration</a:t>
+            </a:r>
+            <a:endParaRPr lang="en-US" sz="1500" dirty="0"/>
+          </a:p>
+        </p:txBody>
+      </p:sp>
+      <p:sp>
+        <p:nvSpPr>
+          <p:cNvPr id="21" name="Text 19"/>
+          <p:cNvSpPr/>
+          <p:nvPr/>
+        </p:nvSpPr>
+        <p:spPr>
+          <a:xfrm>
+            <a:off x="6415888" y="4224528"/>
+            <a:ext cx="2247824" cy="548640"/>
+          </a:xfrm>
+          <a:prstGeom prst="rect">
+            <a:avLst/>
+          </a:prstGeom>
+          <a:noFill/>
+          <a:ln/>
+        </p:spPr>
+        <p:txBody>
+          <a:bodyPr wrap="square" lIns="0" tIns="0" rIns="0" bIns="0" rtlCol="0" anchor="ctr"/>
+          <a:lstStyle/>
+          <a:p>
+            <a:pPr algn="ctr" indent="0" marL="0">
+              <a:lnSpc>
+                <a:spcPct val="120000"/>
+              </a:lnSpc>
+              <a:buNone/>
+            </a:pPr>
+            <a:r>
+              <a:rPr lang="en-US" sz="1000" i="1" dirty="0">
+                <a:solidFill>
+                  <a:srgbClr val="A9B4C9"/>
+                </a:solidFill>
+                <a:latin typeface="Calibri" pitchFamily="34" charset="0"/>
+                <a:ea typeface="Calibri" pitchFamily="34" charset="-122"/>
+                <a:cs typeface="Calibri" pitchFamily="34" charset="-120"/>
+              </a:rPr>
+              <a:t>Cloud Migration · Infrastructure · Scale</a:t>
+            </a:r>
+            <a:endParaRPr lang="en-US" sz="1000" dirty="0"/>
+          </a:p>
+        </p:txBody>
+      </p:sp>
+      <p:sp>
+        <p:nvSpPr>
+          <p:cNvPr id="22" name="Shape 20"/>
+          <p:cNvSpPr/>
+          <p:nvPr/>
+        </p:nvSpPr>
+        <p:spPr>
+          <a:xfrm>
+            <a:off x="9650463" y="2103120"/>
+            <a:ext cx="1554480" cy="1554480"/>
+          </a:xfrm>
+          <a:prstGeom prst="ellipse">
+            <a:avLst/>
+          </a:prstGeom>
+          <a:ln w="19050">
+            <a:solidFill>
+              <a:srgbClr val="D4AF5A"/>
+            </a:solidFill>
+            <a:prstDash val="solid"/>
+          </a:ln>
+        </p:spPr>
+      </p:sp>
+      <p:sp>
+        <p:nvSpPr>
+          <p:cNvPr id="23" name="Shape 21"/>
+          <p:cNvSpPr/>
+          <p:nvPr/>
+        </p:nvSpPr>
+        <p:spPr>
+          <a:xfrm>
+            <a:off x="10042970" y="2517000"/>
+            <a:ext cx="769468" cy="726719"/>
+          </a:xfrm>
+          <a:prstGeom prst="hexagon">
+            <a:avLst/>
+          </a:prstGeom>
+          <a:ln w="22225">
+            <a:solidFill>
+              <a:srgbClr val="D4AF5A"/>
+            </a:solidFill>
+            <a:prstDash val="solid"/>
+          </a:ln>
+        </p:spPr>
+      </p:sp>
+      <p:sp>
+        <p:nvSpPr>
+          <p:cNvPr id="24" name="Text 22"/>
+          <p:cNvSpPr/>
+          <p:nvPr/>
+        </p:nvSpPr>
+        <p:spPr>
+          <a:xfrm>
+            <a:off x="9212351" y="3886200"/>
+            <a:ext cx="2430704" cy="320040"/>
+          </a:xfrm>
+          <a:prstGeom prst="rect">
+            <a:avLst/>
+          </a:prstGeom>
+          <a:noFill/>
+          <a:ln/>
+        </p:spPr>
+        <p:txBody>
+          <a:bodyPr wrap="square" lIns="0" tIns="0" rIns="0" bIns="0" rtlCol="0" anchor="ctr"/>
+          <a:lstStyle/>
+          <a:p>
+            <a:pPr algn="ctr" indent="0" marL="0">
+              <a:buNone/>
+            </a:pPr>
+            <a:r>
+              <a:rPr lang="en-US" sz="1500" b="1" dirty="0">
+                <a:solidFill>
+                  <a:srgbClr val="F2F3F5"/>
+                </a:solidFill>
+                <a:latin typeface="Cambria" pitchFamily="34" charset="0"/>
+                <a:ea typeface="Cambria" pitchFamily="34" charset="-122"/>
+                <a:cs typeface="Cambria" pitchFamily="34" charset="-120"/>
+              </a:rPr>
+              <a:t>Platform</a:t>
+            </a:r>
+            <a:endParaRPr lang="en-US" sz="1500" dirty="0"/>
+          </a:p>
+        </p:txBody>
+      </p:sp>
+      <p:sp>
+        <p:nvSpPr>
+          <p:cNvPr id="25" name="Text 23"/>
+          <p:cNvSpPr/>
+          <p:nvPr/>
+        </p:nvSpPr>
+        <p:spPr>
+          <a:xfrm>
+            <a:off x="9303791" y="4224528"/>
+            <a:ext cx="2247824" cy="548640"/>
+          </a:xfrm>
+          <a:prstGeom prst="rect">
+            <a:avLst/>
+          </a:prstGeom>
+          <a:noFill/>
+          <a:ln/>
+        </p:spPr>
+        <p:txBody>
+          <a:bodyPr wrap="square" lIns="0" tIns="0" rIns="0" bIns="0" rtlCol="0" anchor="ctr"/>
+          <a:lstStyle/>
+          <a:p>
+            <a:pPr algn="ctr" indent="0" marL="0">
+              <a:lnSpc>
+                <a:spcPct val="120000"/>
+              </a:lnSpc>
+              <a:buNone/>
+            </a:pPr>
+            <a:r>
+              <a:rPr lang="en-US" sz="1000" i="1" dirty="0">
+                <a:solidFill>
+                  <a:srgbClr val="A9B4C9"/>
+                </a:solidFill>
+                <a:latin typeface="Calibri" pitchFamily="34" charset="0"/>
+                <a:ea typeface="Calibri" pitchFamily="34" charset="-122"/>
+                <a:cs typeface="Calibri" pitchFamily="34" charset="-120"/>
+              </a:rPr>
+              <a:t>Platform · Integration · Unified System</a:t>
+            </a:r>
+            <a:endParaRPr lang="en-US" sz="1000" dirty="0"/>
+          </a:p>
+        </p:txBody>
+      </p:sp>
+      <p:sp>
+        <p:nvSpPr>
+          <p:cNvPr id="25" name="Slide Number Placeholder 0"/>
+          <p:cNvSpPr>
+            <a:spLocks noGrp="1"/>
+          </p:cNvSpPr>
+          <p:nvPr>
+            <p:ph type="sldNum" sz="quarter" idx="4294967295"/>
+          </p:nvPr>
+        </p:nvSpPr>
+        <p:spPr>
+          <a:xfrm>
+            <a:off x="10728655" y="6446520"/>
+            <a:ext cx="800000" cy="300000"/>
+          </a:xfrm>
+          <a:prstGeom prst="rect">
+            <a:avLst/>
+          </a:prstGeom>
+          <a:extLst>
+            <a:ext uri="{C572A759-6A51-4108-AA02-DFA0A04FC94B}">
+              <ma14:wrappingTextBoxFlag xmlns:ma14="http://schemas.microsoft.com/office/mac/drawingml/2011/main" val="0"/>
+            </a:ext>
+          </a:extLst>
+        </p:spPr>
+        <p:txBody>
+          <a:bodyPr/>
+          <a:lstStyle>
+            <a:lvl1pPr>
+              <a:defRPr sz="1000">
+                <a:solidFill>
+                  <a:srgbClr val="A9B4C9"/>
+                </a:solidFill>
+                <a:latin typeface="Calibri"/>
+                <a:ea typeface="Calibri"/>
+                <a:cs typeface="Calibri"/>
+              </a:defRPr>
+            </a:lvl1pPr>
+          </a:lstStyle>
+          <a:p>
+            <a:pPr algn="r"/>
+            <a:fld id="{F7021451-1387-4CA6-816F-3879F97B5CBC}" type="slidenum">
+              <a:rPr b="0" lang="en-US"/>
+              <a:t>22</a:t>
             </a:fld>
             <a:endParaRPr lang="en-US"/>
           </a:p>
